--- a/modulo-03/03.03 - Definindo Tipos de Dados Globais/03.03_Definindo_tipos_de_dados_globais.pptx
+++ b/modulo-03/03.03 - Definindo Tipos de Dados Globais/03.03_Definindo_tipos_de_dados_globais.pptx
@@ -1817,7 +1817,7 @@
                   <a:srgbClr val="8FA3C7"/>
                 </a:solidFill>
               </a:rPr>
-              <a:t>ABAP Moderno · Módulo 02 — Modelagem de Dados com Dicionário e CDS  ·  Aula 3 de 7 — Tipos globais</a:t>
+              <a:t>ABAP Moderno · Módulo 03 — Modelagem de Dados com Dicionário e CDS  ·  Aula 3 de 7 — Tipos globais</a:t>
             </a:r>
             <a:endParaRPr lang="en-US" sz="900" dirty="0"/>
           </a:p>
@@ -1963,7 +1963,7 @@
                   <a:srgbClr val="556B82"/>
                 </a:solidFill>
               </a:rPr>
-              <a:t>ABAP Moderno · Módulo 02 — Modelagem de Dados com Dicionário e CDS  ·  Aula 3 de 7 — Tipos globais</a:t>
+              <a:t>ABAP Moderno · Módulo 03 — Modelagem de Dados com Dicionário e CDS  ·  Aula 3 de 7 — Tipos globais</a:t>
             </a:r>
             <a:endParaRPr lang="en-US" sz="900" dirty="0"/>
           </a:p>
@@ -2394,7 +2394,7 @@
                   <a:srgbClr val="89D1FF"/>
                 </a:solidFill>
               </a:rPr>
-              <a:t>MÓDULO 02 · AULA 03 DE 07</a:t>
+              <a:t>MÓDULO 03 · AULA 03 DE 07</a:t>
             </a:r>
             <a:endParaRPr lang="en-US" sz="1400" dirty="0"/>
           </a:p>
@@ -2736,7 +2736,7 @@
                   <a:srgbClr val="8FA3C7"/>
                 </a:solidFill>
               </a:rPr>
-              <a:t>ABAP Moderno · Módulo 02 — Modelagem de Dados com Dicionário e CDS · Design System SAP Horizon</a:t>
+              <a:t>ABAP Moderno · Módulo 03 — Modelagem de Dados com Dicionário e CDS · Design System SAP Horizon</a:t>
             </a:r>
             <a:endParaRPr lang="en-US" sz="1100" dirty="0"/>
           </a:p>
@@ -2983,7 +2983,7 @@
         <p:spPr>
           <a:xfrm>
             <a:off x="640080" y="2084832"/>
-            <a:ext cx="2075688" cy="292608"/>
+            <a:ext cx="1842516" cy="292608"/>
           </a:xfrm>
           <a:prstGeom prst="rect">
             <a:avLst/>
@@ -3003,7 +3003,7 @@
         <p:spPr>
           <a:xfrm>
             <a:off x="640080" y="2084832"/>
-            <a:ext cx="2075688" cy="27432"/>
+            <a:ext cx="1842516" cy="27432"/>
           </a:xfrm>
           <a:prstGeom prst="rect">
             <a:avLst/>
@@ -3023,7 +3023,7 @@
         <p:spPr>
           <a:xfrm>
             <a:off x="731520" y="2103120"/>
-            <a:ext cx="1892808" cy="274320"/>
+            <a:ext cx="1659636" cy="274320"/>
           </a:xfrm>
           <a:prstGeom prst="rect">
             <a:avLst/>
@@ -3044,7 +3044,7 @@
                   <a:srgbClr val="FFFFFF"/>
                 </a:solidFill>
               </a:rPr>
-              <a:t>zs4d430_t_address.ttyp</a:t>
+              <a:t>zpc_t_endereco.ttyp</a:t>
             </a:r>
             <a:endParaRPr lang="en-US" sz="950" dirty="0"/>
           </a:p>
@@ -3351,7 +3351,7 @@
                 <a:ea typeface="Courier New" pitchFamily="34" charset="-122"/>
                 <a:cs typeface="Courier New" pitchFamily="34" charset="-120"/>
               </a:rPr>
-              <a:t>zs4d430_s_address</a:t>
+              <a:t>zpc_s_endereco</a:t>
             </a:r>
             <a:endParaRPr lang="en-US" sz="1050" dirty="0"/>
           </a:p>
@@ -3763,29 +3763,7 @@
                 <a:ea typeface="Courier New" pitchFamily="34" charset="-122"/>
                 <a:cs typeface="Courier New" pitchFamily="34" charset="-120"/>
               </a:rPr>
-              <a:t>post_code</a:t>
-            </a:r>
-            <a:r>
-              <a:rPr lang="en-US" sz="1050" dirty="0">
-                <a:solidFill>
-                  <a:srgbClr val="CCCCCC"/>
-                </a:solidFill>
-                <a:latin typeface="Courier New" pitchFamily="34" charset="0"/>
-                <a:ea typeface="Courier New" pitchFamily="34" charset="-122"/>
-                <a:cs typeface="Courier New" pitchFamily="34" charset="-120"/>
-              </a:rPr>
-              <a:t> </a:t>
-            </a:r>
-            <a:r>
-              <a:rPr lang="en-US" sz="1050" dirty="0">
-                <a:solidFill>
-                  <a:srgbClr val="CCCCCC"/>
-                </a:solidFill>
-                <a:latin typeface="Courier New" pitchFamily="34" charset="0"/>
-                <a:ea typeface="Courier New" pitchFamily="34" charset="-122"/>
-                <a:cs typeface="Courier New" pitchFamily="34" charset="-120"/>
-              </a:rPr>
-              <a:t>city</a:t>
+              <a:t>cep</a:t>
             </a:r>
             <a:endParaRPr lang="en-US" sz="1050" dirty="0"/>
           </a:p>
@@ -4269,7 +4247,7 @@
                 <a:ea typeface="Courier New" pitchFamily="34" charset="-122"/>
                 <a:cs typeface="Courier New" pitchFamily="34" charset="-120"/>
               </a:rPr>
-              <a:t>tt_addresses</a:t>
+              <a:t>tt_enderecos</a:t>
             </a:r>
             <a:r>
               <a:rPr lang="en-US" sz="1050" dirty="0">
@@ -4388,7 +4366,7 @@
                 <a:ea typeface="Courier New" pitchFamily="34" charset="-122"/>
                 <a:cs typeface="Courier New" pitchFamily="34" charset="-120"/>
               </a:rPr>
-              <a:t>zs4d430_s_address</a:t>
+              <a:t>zpc_s_endereco</a:t>
             </a:r>
             <a:endParaRPr lang="en-US" sz="1050" dirty="0"/>
           </a:p>
@@ -4485,29 +4463,7 @@
                 <a:ea typeface="Courier New" pitchFamily="34" charset="-122"/>
                 <a:cs typeface="Courier New" pitchFamily="34" charset="-120"/>
               </a:rPr>
-              <a:t>post_code</a:t>
-            </a:r>
-            <a:r>
-              <a:rPr lang="en-US" sz="1050" dirty="0">
-                <a:solidFill>
-                  <a:srgbClr val="CCCCCC"/>
-                </a:solidFill>
-                <a:latin typeface="Courier New" pitchFamily="34" charset="0"/>
-                <a:ea typeface="Courier New" pitchFamily="34" charset="-122"/>
-                <a:cs typeface="Courier New" pitchFamily="34" charset="-120"/>
-              </a:rPr>
-              <a:t> </a:t>
-            </a:r>
-            <a:r>
-              <a:rPr lang="en-US" sz="1050" dirty="0">
-                <a:solidFill>
-                  <a:srgbClr val="CCCCCC"/>
-                </a:solidFill>
-                <a:latin typeface="Courier New" pitchFamily="34" charset="0"/>
-                <a:ea typeface="Courier New" pitchFamily="34" charset="-122"/>
-                <a:cs typeface="Courier New" pitchFamily="34" charset="-120"/>
-              </a:rPr>
-              <a:t>city</a:t>
+              <a:t>cep</a:t>
             </a:r>
             <a:r>
               <a:rPr lang="en-US" sz="1050" dirty="0">
@@ -4774,7 +4730,7 @@
                   <a:srgbClr val="89D1FF"/>
                 </a:solidFill>
               </a:rPr>
-              <a:t>AULA 02.03 · SEÇÃO 4</a:t>
+              <a:t>AULA 03.03 · SEÇÃO 4</a:t>
             </a:r>
             <a:endParaRPr lang="en-US" sz="1300" dirty="0"/>
           </a:p>
@@ -5297,7 +5253,7 @@
         <p:spPr>
           <a:xfrm>
             <a:off x="640080" y="1700784"/>
-            <a:ext cx="2075688" cy="292608"/>
+            <a:ext cx="2464308" cy="292608"/>
           </a:xfrm>
           <a:prstGeom prst="rect">
             <a:avLst/>
@@ -5317,7 +5273,7 @@
         <p:spPr>
           <a:xfrm>
             <a:off x="640080" y="1700784"/>
-            <a:ext cx="2075688" cy="27432"/>
+            <a:ext cx="2464308" cy="27432"/>
           </a:xfrm>
           <a:prstGeom prst="rect">
             <a:avLst/>
@@ -5337,7 +5293,7 @@
         <p:spPr>
           <a:xfrm>
             <a:off x="731520" y="1719072"/>
-            <a:ext cx="1892808" cy="274320"/>
+            <a:ext cx="2281428" cy="274320"/>
           </a:xfrm>
           <a:prstGeom prst="rect">
             <a:avLst/>
@@ -5358,7 +5314,7 @@
                   <a:srgbClr val="FFFFFF"/>
                 </a:solidFill>
               </a:rPr>
-              <a:t>zcl_03_types.clas.abap</a:t>
+              <a:t>zcl_pc_tipos_demo.clas.abap</a:t>
             </a:r>
             <a:endParaRPr lang="en-US" sz="950" dirty="0"/>
           </a:p>
@@ -5394,7 +5350,7 @@
                   <a:srgbClr val="9DA5B4"/>
                 </a:solidFill>
               </a:rPr>
-              <a:t>ZS4D430_## › ZCL_03_TYPES › main</a:t>
+              <a:t>Exemplo (os tipos ZPC_* do Dicionário são ilustrativos)</a:t>
             </a:r>
             <a:endParaRPr lang="en-US" sz="850" dirty="0"/>
           </a:p>
@@ -5640,7 +5596,7 @@
                 <a:ea typeface="Courier New" pitchFamily="34" charset="-122"/>
                 <a:cs typeface="Courier New" pitchFamily="34" charset="-120"/>
               </a:rPr>
-              <a:t>travel</a:t>
+              <a:t>pedido</a:t>
             </a:r>
             <a:r>
               <a:rPr lang="en-US" sz="1050" dirty="0">
@@ -5678,13 +5634,13 @@
             <a:r>
               <a:rPr lang="en-US" sz="1050" dirty="0">
                 <a:solidFill>
-                  <a:srgbClr val="4EC9B0"/>
-                </a:solidFill>
-                <a:latin typeface="Courier New" pitchFamily="34" charset="0"/>
-                <a:ea typeface="Courier New" pitchFamily="34" charset="-122"/>
-                <a:cs typeface="Courier New" pitchFamily="34" charset="-120"/>
-              </a:rPr>
-              <a:t>/dmo/travel_id</a:t>
+                  <a:srgbClr val="CCCCCC"/>
+                </a:solidFill>
+                <a:latin typeface="Courier New" pitchFamily="34" charset="0"/>
+                <a:ea typeface="Courier New" pitchFamily="34" charset="-122"/>
+                <a:cs typeface="Courier New" pitchFamily="34" charset="-120"/>
+              </a:rPr>
+              <a:t>zpc_numero_pedido</a:t>
             </a:r>
             <a:r>
               <a:rPr lang="en-US" sz="1050" dirty="0">
@@ -5706,7 +5662,7 @@
                 <a:ea typeface="Courier New" pitchFamily="34" charset="-122"/>
                 <a:cs typeface="Courier New" pitchFamily="34" charset="-120"/>
               </a:rPr>
-              <a:t>        </a:t>
+              <a:t>     </a:t>
             </a:r>
             <a:r>
               <a:rPr lang="en-US" sz="1050" i="1" dirty="0">
@@ -5737,7 +5693,7 @@
                 <a:ea typeface="Courier New" pitchFamily="34" charset="-122"/>
                 <a:cs typeface="Courier New" pitchFamily="34" charset="-120"/>
               </a:rPr>
-              <a:t>* DATA travel TYPE /dmo/s_travel_key.   " structure</a:t>
+              <a:t>* DATA pedido TYPE zpc_s_pedido_chave.  " structure</a:t>
             </a:r>
             <a:endParaRPr lang="en-US" sz="1050" dirty="0"/>
           </a:p>
@@ -5757,7 +5713,7 @@
                 <a:ea typeface="Courier New" pitchFamily="34" charset="-122"/>
                 <a:cs typeface="Courier New" pitchFamily="34" charset="-120"/>
               </a:rPr>
-              <a:t>* DATA travel TYPE /dmo/travel.         " database table</a:t>
+              <a:t>* DATA pedido TYPE zta_pc_pedido.       " database table</a:t>
             </a:r>
             <a:endParaRPr lang="en-US" sz="1050" dirty="0"/>
           </a:p>
@@ -5777,7 +5733,7 @@
                 <a:ea typeface="Courier New" pitchFamily="34" charset="-122"/>
                 <a:cs typeface="Courier New" pitchFamily="34" charset="-120"/>
               </a:rPr>
-              <a:t>* DATA travel TYPE /dmo/t_travel.       " table type</a:t>
+              <a:t>* DATA pedido TYPE zpc_t_pedidos.       " table type</a:t>
             </a:r>
             <a:endParaRPr lang="en-US" sz="1050" dirty="0"/>
           </a:p>
@@ -5817,7 +5773,7 @@
                 <a:ea typeface="Courier New" pitchFamily="34" charset="-122"/>
                 <a:cs typeface="Courier New" pitchFamily="34" charset="-120"/>
               </a:rPr>
-              <a:t>travel</a:t>
+              <a:t>pedido</a:t>
             </a:r>
             <a:r>
               <a:rPr lang="en-US" sz="1050" dirty="0">
@@ -5861,7 +5817,7 @@
                 <a:ea typeface="Courier New" pitchFamily="34" charset="-122"/>
                 <a:cs typeface="Courier New" pitchFamily="34" charset="-120"/>
               </a:rPr>
-              <a:t>'123'</a:t>
+              <a:t>'0000000001'</a:t>
             </a:r>
             <a:r>
               <a:rPr lang="en-US" sz="1050" dirty="0">
@@ -5883,7 +5839,7 @@
                 <a:ea typeface="Courier New" pitchFamily="34" charset="-122"/>
                 <a:cs typeface="Courier New" pitchFamily="34" charset="-120"/>
               </a:rPr>
-              <a:t>                          </a:t>
+              <a:t>                              </a:t>
             </a:r>
             <a:r>
               <a:rPr lang="en-US" sz="1050" i="1" dirty="0">
@@ -5914,7 +5870,7 @@
                 <a:ea typeface="Courier New" pitchFamily="34" charset="-122"/>
                 <a:cs typeface="Courier New" pitchFamily="34" charset="-120"/>
               </a:rPr>
-              <a:t>travel</a:t>
+              <a:t>pedido</a:t>
             </a:r>
             <a:r>
               <a:rPr lang="en-US" sz="1050" dirty="0">
@@ -6013,7 +5969,7 @@
                 <a:ea typeface="Courier New" pitchFamily="34" charset="-122"/>
                 <a:cs typeface="Courier New" pitchFamily="34" charset="-120"/>
               </a:rPr>
-              <a:t>travel_id</a:t>
+              <a:t>numero_pedido</a:t>
             </a:r>
             <a:r>
               <a:rPr lang="en-US" sz="1050" dirty="0">
@@ -6057,7 +6013,7 @@
                 <a:ea typeface="Courier New" pitchFamily="34" charset="-122"/>
                 <a:cs typeface="Courier New" pitchFamily="34" charset="-120"/>
               </a:rPr>
-              <a:t>'123'</a:t>
+              <a:t>'0000000001'</a:t>
             </a:r>
             <a:r>
               <a:rPr lang="en-US" sz="1050" dirty="0">
@@ -6132,7 +6088,7 @@
                 <a:ea typeface="Courier New" pitchFamily="34" charset="-122"/>
                 <a:cs typeface="Courier New" pitchFamily="34" charset="-120"/>
               </a:rPr>
-              <a:t>travel</a:t>
+              <a:t>pedido</a:t>
             </a:r>
             <a:r>
               <a:rPr lang="en-US" sz="1050" dirty="0">
@@ -6253,7 +6209,7 @@
                 <a:ea typeface="Courier New" pitchFamily="34" charset="-122"/>
                 <a:cs typeface="Courier New" pitchFamily="34" charset="-120"/>
               </a:rPr>
-              <a:t>travel_id</a:t>
+              <a:t>numero_pedido</a:t>
             </a:r>
             <a:r>
               <a:rPr lang="en-US" sz="1050" dirty="0">
@@ -6297,7 +6253,7 @@
                 <a:ea typeface="Courier New" pitchFamily="34" charset="-122"/>
                 <a:cs typeface="Courier New" pitchFamily="34" charset="-120"/>
               </a:rPr>
-              <a:t>'123'</a:t>
+              <a:t>'0000000001'</a:t>
             </a:r>
             <a:r>
               <a:rPr lang="en-US" sz="1050" dirty="0">
@@ -6929,7 +6885,26 @@
                   <a:srgbClr val="1D2D3E"/>
                 </a:solidFill>
               </a:rPr>
-              <a:t>evite criar objetos do Dicionário só para tipar dados; use tipos públicos de classes e interfaces, que trazem contexto.</a:t>
+              <a:t>evite criar objetos do Dicionário só para tipar dados; use tipos de classes e interfaces, como </a:t>
+            </a:r>
+            <a:r>
+              <a:rPr lang="en-US" sz="1200" dirty="0">
+                <a:solidFill>
+                  <a:srgbClr val="0064D9"/>
+                </a:solidFill>
+                <a:latin typeface="Courier New" pitchFamily="34" charset="0"/>
+                <a:ea typeface="Courier New" pitchFamily="34" charset="-122"/>
+                <a:cs typeface="Courier New" pitchFamily="34" charset="-120"/>
+              </a:rPr>
+              <a:t>zif_pc_numeracao=&gt;ty_sku</a:t>
+            </a:r>
+            <a:r>
+              <a:rPr lang="en-US" sz="1200" dirty="0">
+                <a:solidFill>
+                  <a:srgbClr val="1D2D3E"/>
+                </a:solidFill>
+              </a:rPr>
+              <a:t> no projeto.</a:t>
             </a:r>
             <a:endParaRPr lang="en-US" sz="1400" dirty="0"/>
           </a:p>
@@ -7163,7 +7138,7 @@
         <p:spPr>
           <a:xfrm>
             <a:off x="640080" y="1700784"/>
-            <a:ext cx="2464308" cy="292608"/>
+            <a:ext cx="2153412" cy="292608"/>
           </a:xfrm>
           <a:prstGeom prst="rect">
             <a:avLst/>
@@ -7183,7 +7158,7 @@
         <p:spPr>
           <a:xfrm>
             <a:off x="640080" y="1700784"/>
-            <a:ext cx="2464308" cy="27432"/>
+            <a:ext cx="2153412" cy="27432"/>
           </a:xfrm>
           <a:prstGeom prst="rect">
             <a:avLst/>
@@ -7203,7 +7178,7 @@
         <p:spPr>
           <a:xfrm>
             <a:off x="731520" y="1719072"/>
-            <a:ext cx="2281428" cy="274320"/>
+            <a:ext cx="1970532" cy="274320"/>
           </a:xfrm>
           <a:prstGeom prst="rect">
             <a:avLst/>
@@ -7224,7 +7199,7 @@
                   <a:srgbClr val="FFFFFF"/>
                 </a:solidFill>
               </a:rPr>
-              <a:t>zif_s4d430_status.intf.abap</a:t>
+              <a:t>zif_pc_status.intf.abap</a:t>
             </a:r>
             <a:endParaRPr lang="en-US" sz="950" dirty="0"/>
           </a:p>
@@ -7260,7 +7235,7 @@
                   <a:srgbClr val="9DA5B4"/>
                 </a:solidFill>
               </a:rPr>
-              <a:t>ZS4D430_## › ZIF_S4D430_STATUS</a:t>
+              <a:t>Alternativa às constantes c_status_pedido de ZIF_PC_CONSTANTS</a:t>
             </a:r>
             <a:endParaRPr lang="en-US" sz="850" dirty="0"/>
           </a:p>
@@ -7566,6 +7541,26 @@
             </a:r>
             <a:endParaRPr lang="en-US" sz="1050" dirty="0"/>
           </a:p>
+          <a:p>
+            <a:pPr algn="r" indent="0" marL="0">
+              <a:lnSpc>
+                <a:spcPct val="105000"/>
+              </a:lnSpc>
+              <a:buNone/>
+            </a:pPr>
+            <a:r>
+              <a:rPr lang="en-US" sz="1050" dirty="0">
+                <a:solidFill>
+                  <a:srgbClr val="6E7681"/>
+                </a:solidFill>
+                <a:latin typeface="Courier New" pitchFamily="34" charset="0"/>
+                <a:ea typeface="Courier New" pitchFamily="34" charset="-122"/>
+                <a:cs typeface="Courier New" pitchFamily="34" charset="-120"/>
+              </a:rPr>
+              <a:t>15</a:t>
+            </a:r>
+            <a:endParaRPr lang="en-US" sz="1050" dirty="0"/>
+          </a:p>
         </p:txBody>
       </p:sp>
       <p:sp>
@@ -7626,7 +7621,7 @@
                 <a:ea typeface="Courier New" pitchFamily="34" charset="-122"/>
                 <a:cs typeface="Courier New" pitchFamily="34" charset="-120"/>
               </a:rPr>
-              <a:t>zif_s4d430_status</a:t>
+              <a:t>zif_pc_status</a:t>
             </a:r>
             <a:r>
               <a:rPr lang="en-US" sz="1050" dirty="0">
@@ -7884,7 +7879,7 @@
                 <a:ea typeface="Courier New" pitchFamily="34" charset="-122"/>
                 <a:cs typeface="Courier New" pitchFamily="34" charset="-120"/>
               </a:rPr>
-              <a:t>open</a:t>
+              <a:t>aberto</a:t>
             </a:r>
             <a:r>
               <a:rPr lang="en-US" sz="1050" dirty="0">
@@ -7926,7 +7921,7 @@
                 <a:ea typeface="Courier New" pitchFamily="34" charset="-122"/>
                 <a:cs typeface="Courier New" pitchFamily="34" charset="-120"/>
               </a:rPr>
-              <a:t>accepted</a:t>
+              <a:t>aguardando_aprovacao</a:t>
             </a:r>
             <a:r>
               <a:rPr lang="en-US" sz="1050" dirty="0">
@@ -7968,7 +7963,7 @@
                 <a:ea typeface="Courier New" pitchFamily="34" charset="-122"/>
                 <a:cs typeface="Courier New" pitchFamily="34" charset="-120"/>
               </a:rPr>
-              <a:t>rejected</a:t>
+              <a:t>finalizado</a:t>
             </a:r>
             <a:r>
               <a:rPr lang="en-US" sz="1050" dirty="0">
@@ -7999,139 +7994,29 @@
                 <a:ea typeface="Courier New" pitchFamily="34" charset="-122"/>
                 <a:cs typeface="Courier New" pitchFamily="34" charset="-120"/>
               </a:rPr>
-              <a:t>    </a:t>
-            </a:r>
-            <a:r>
-              <a:rPr lang="en-US" sz="1050" dirty="0">
-                <a:solidFill>
-                  <a:srgbClr val="569CD6"/>
-                </a:solidFill>
-                <a:latin typeface="Courier New" pitchFamily="34" charset="0"/>
-                <a:ea typeface="Courier New" pitchFamily="34" charset="-122"/>
-                <a:cs typeface="Courier New" pitchFamily="34" charset="-120"/>
-              </a:rPr>
-              <a:t>END</a:t>
-            </a:r>
-            <a:r>
-              <a:rPr lang="en-US" sz="1050" dirty="0">
-                <a:solidFill>
-                  <a:srgbClr val="CCCCCC"/>
-                </a:solidFill>
-                <a:latin typeface="Courier New" pitchFamily="34" charset="0"/>
-                <a:ea typeface="Courier New" pitchFamily="34" charset="-122"/>
-                <a:cs typeface="Courier New" pitchFamily="34" charset="-120"/>
-              </a:rPr>
-              <a:t> </a:t>
-            </a:r>
-            <a:r>
-              <a:rPr lang="en-US" sz="1050" dirty="0">
-                <a:solidFill>
-                  <a:srgbClr val="569CD6"/>
-                </a:solidFill>
-                <a:latin typeface="Courier New" pitchFamily="34" charset="0"/>
-                <a:ea typeface="Courier New" pitchFamily="34" charset="-122"/>
-                <a:cs typeface="Courier New" pitchFamily="34" charset="-120"/>
-              </a:rPr>
-              <a:t>OF</a:t>
-            </a:r>
-            <a:r>
-              <a:rPr lang="en-US" sz="1050" dirty="0">
-                <a:solidFill>
-                  <a:srgbClr val="CCCCCC"/>
-                </a:solidFill>
-                <a:latin typeface="Courier New" pitchFamily="34" charset="0"/>
-                <a:ea typeface="Courier New" pitchFamily="34" charset="-122"/>
-                <a:cs typeface="Courier New" pitchFamily="34" charset="-120"/>
-              </a:rPr>
-              <a:t> </a:t>
-            </a:r>
-            <a:r>
-              <a:rPr lang="en-US" sz="1050" dirty="0">
-                <a:solidFill>
-                  <a:srgbClr val="569CD6"/>
-                </a:solidFill>
-                <a:latin typeface="Courier New" pitchFamily="34" charset="0"/>
-                <a:ea typeface="Courier New" pitchFamily="34" charset="-122"/>
-                <a:cs typeface="Courier New" pitchFamily="34" charset="-120"/>
-              </a:rPr>
-              <a:t>ENUM</a:t>
-            </a:r>
-            <a:r>
-              <a:rPr lang="en-US" sz="1050" dirty="0">
-                <a:solidFill>
-                  <a:srgbClr val="CCCCCC"/>
-                </a:solidFill>
-                <a:latin typeface="Courier New" pitchFamily="34" charset="0"/>
-                <a:ea typeface="Courier New" pitchFamily="34" charset="-122"/>
-                <a:cs typeface="Courier New" pitchFamily="34" charset="-120"/>
-              </a:rPr>
-              <a:t> </a:t>
-            </a:r>
-            <a:r>
-              <a:rPr lang="en-US" sz="1050" dirty="0">
-                <a:solidFill>
-                  <a:srgbClr val="CCCCCC"/>
-                </a:solidFill>
-                <a:latin typeface="Courier New" pitchFamily="34" charset="0"/>
-                <a:ea typeface="Courier New" pitchFamily="34" charset="-122"/>
-                <a:cs typeface="Courier New" pitchFamily="34" charset="-120"/>
-              </a:rPr>
-              <a:t>ty_status</a:t>
-            </a:r>
-            <a:r>
-              <a:rPr lang="en-US" sz="1050" dirty="0">
-                <a:solidFill>
-                  <a:srgbClr val="CCCCCC"/>
-                </a:solidFill>
-                <a:latin typeface="Courier New" pitchFamily="34" charset="0"/>
-                <a:ea typeface="Courier New" pitchFamily="34" charset="-122"/>
-                <a:cs typeface="Courier New" pitchFamily="34" charset="-120"/>
-              </a:rPr>
-              <a:t> </a:t>
-            </a:r>
-            <a:r>
-              <a:rPr lang="en-US" sz="1050" dirty="0">
-                <a:solidFill>
-                  <a:srgbClr val="569CD6"/>
-                </a:solidFill>
-                <a:latin typeface="Courier New" pitchFamily="34" charset="0"/>
-                <a:ea typeface="Courier New" pitchFamily="34" charset="-122"/>
-                <a:cs typeface="Courier New" pitchFamily="34" charset="-120"/>
-              </a:rPr>
-              <a:t>STRUCTURE</a:t>
-            </a:r>
-            <a:r>
-              <a:rPr lang="en-US" sz="1050" dirty="0">
-                <a:solidFill>
-                  <a:srgbClr val="CCCCCC"/>
-                </a:solidFill>
-                <a:latin typeface="Courier New" pitchFamily="34" charset="0"/>
-                <a:ea typeface="Courier New" pitchFamily="34" charset="-122"/>
-                <a:cs typeface="Courier New" pitchFamily="34" charset="-120"/>
-              </a:rPr>
-              <a:t> </a:t>
-            </a:r>
-            <a:r>
-              <a:rPr lang="en-US" sz="1050" dirty="0">
-                <a:solidFill>
-                  <a:srgbClr val="CCCCCC"/>
-                </a:solidFill>
-                <a:latin typeface="Courier New" pitchFamily="34" charset="0"/>
-                <a:ea typeface="Courier New" pitchFamily="34" charset="-122"/>
-                <a:cs typeface="Courier New" pitchFamily="34" charset="-120"/>
-              </a:rPr>
-              <a:t>status</a:t>
-            </a:r>
-            <a:r>
-              <a:rPr lang="en-US" sz="1050" dirty="0">
-                <a:solidFill>
-                  <a:srgbClr val="CCCCCC"/>
-                </a:solidFill>
-                <a:latin typeface="Courier New" pitchFamily="34" charset="0"/>
-                <a:ea typeface="Courier New" pitchFamily="34" charset="-122"/>
-                <a:cs typeface="Courier New" pitchFamily="34" charset="-120"/>
-              </a:rPr>
-              <a:t>.</a:t>
+              <a:t>      </a:t>
+            </a:r>
+            <a:r>
+              <a:rPr lang="en-US" sz="1050" dirty="0">
+                <a:solidFill>
+                  <a:srgbClr val="CCCCCC"/>
+                </a:solidFill>
+                <a:latin typeface="Courier New" pitchFamily="34" charset="0"/>
+                <a:ea typeface="Courier New" pitchFamily="34" charset="-122"/>
+                <a:cs typeface="Courier New" pitchFamily="34" charset="-120"/>
+              </a:rPr>
+              <a:t>cancelado</a:t>
+            </a:r>
+            <a:r>
+              <a:rPr lang="en-US" sz="1050" dirty="0">
+                <a:solidFill>
+                  <a:srgbClr val="CCCCCC"/>
+                </a:solidFill>
+                <a:latin typeface="Courier New" pitchFamily="34" charset="0"/>
+                <a:ea typeface="Courier New" pitchFamily="34" charset="-122"/>
+                <a:cs typeface="Courier New" pitchFamily="34" charset="-120"/>
+              </a:rPr>
+              <a:t>,</a:t>
             </a:r>
             <a:endParaRPr lang="en-US" sz="1050" dirty="0"/>
           </a:p>
@@ -8145,13 +8030,134 @@
             <a:r>
               <a:rPr lang="en-US" sz="1050" dirty="0">
                 <a:solidFill>
+                  <a:srgbClr val="CCCCCC"/>
+                </a:solidFill>
+                <a:latin typeface="Courier New" pitchFamily="34" charset="0"/>
+                <a:ea typeface="Courier New" pitchFamily="34" charset="-122"/>
+                <a:cs typeface="Courier New" pitchFamily="34" charset="-120"/>
+              </a:rPr>
+              <a:t>    </a:t>
+            </a:r>
+            <a:r>
+              <a:rPr lang="en-US" sz="1050" dirty="0">
+                <a:solidFill>
                   <a:srgbClr val="569CD6"/>
                 </a:solidFill>
                 <a:latin typeface="Courier New" pitchFamily="34" charset="0"/>
                 <a:ea typeface="Courier New" pitchFamily="34" charset="-122"/>
                 <a:cs typeface="Courier New" pitchFamily="34" charset="-120"/>
               </a:rPr>
-              <a:t>ENDINTERFACE</a:t>
+              <a:t>END</a:t>
+            </a:r>
+            <a:r>
+              <a:rPr lang="en-US" sz="1050" dirty="0">
+                <a:solidFill>
+                  <a:srgbClr val="CCCCCC"/>
+                </a:solidFill>
+                <a:latin typeface="Courier New" pitchFamily="34" charset="0"/>
+                <a:ea typeface="Courier New" pitchFamily="34" charset="-122"/>
+                <a:cs typeface="Courier New" pitchFamily="34" charset="-120"/>
+              </a:rPr>
+              <a:t> </a:t>
+            </a:r>
+            <a:r>
+              <a:rPr lang="en-US" sz="1050" dirty="0">
+                <a:solidFill>
+                  <a:srgbClr val="569CD6"/>
+                </a:solidFill>
+                <a:latin typeface="Courier New" pitchFamily="34" charset="0"/>
+                <a:ea typeface="Courier New" pitchFamily="34" charset="-122"/>
+                <a:cs typeface="Courier New" pitchFamily="34" charset="-120"/>
+              </a:rPr>
+              <a:t>OF</a:t>
+            </a:r>
+            <a:r>
+              <a:rPr lang="en-US" sz="1050" dirty="0">
+                <a:solidFill>
+                  <a:srgbClr val="CCCCCC"/>
+                </a:solidFill>
+                <a:latin typeface="Courier New" pitchFamily="34" charset="0"/>
+                <a:ea typeface="Courier New" pitchFamily="34" charset="-122"/>
+                <a:cs typeface="Courier New" pitchFamily="34" charset="-120"/>
+              </a:rPr>
+              <a:t> </a:t>
+            </a:r>
+            <a:r>
+              <a:rPr lang="en-US" sz="1050" dirty="0">
+                <a:solidFill>
+                  <a:srgbClr val="569CD6"/>
+                </a:solidFill>
+                <a:latin typeface="Courier New" pitchFamily="34" charset="0"/>
+                <a:ea typeface="Courier New" pitchFamily="34" charset="-122"/>
+                <a:cs typeface="Courier New" pitchFamily="34" charset="-120"/>
+              </a:rPr>
+              <a:t>ENUM</a:t>
+            </a:r>
+            <a:r>
+              <a:rPr lang="en-US" sz="1050" dirty="0">
+                <a:solidFill>
+                  <a:srgbClr val="CCCCCC"/>
+                </a:solidFill>
+                <a:latin typeface="Courier New" pitchFamily="34" charset="0"/>
+                <a:ea typeface="Courier New" pitchFamily="34" charset="-122"/>
+                <a:cs typeface="Courier New" pitchFamily="34" charset="-120"/>
+              </a:rPr>
+              <a:t> </a:t>
+            </a:r>
+            <a:r>
+              <a:rPr lang="en-US" sz="1050" dirty="0">
+                <a:solidFill>
+                  <a:srgbClr val="CCCCCC"/>
+                </a:solidFill>
+                <a:latin typeface="Courier New" pitchFamily="34" charset="0"/>
+                <a:ea typeface="Courier New" pitchFamily="34" charset="-122"/>
+                <a:cs typeface="Courier New" pitchFamily="34" charset="-120"/>
+              </a:rPr>
+              <a:t>ty_status</a:t>
+            </a:r>
+            <a:r>
+              <a:rPr lang="en-US" sz="1050" dirty="0">
+                <a:solidFill>
+                  <a:srgbClr val="CCCCCC"/>
+                </a:solidFill>
+                <a:latin typeface="Courier New" pitchFamily="34" charset="0"/>
+                <a:ea typeface="Courier New" pitchFamily="34" charset="-122"/>
+                <a:cs typeface="Courier New" pitchFamily="34" charset="-120"/>
+              </a:rPr>
+              <a:t> </a:t>
+            </a:r>
+            <a:r>
+              <a:rPr lang="en-US" sz="1050" dirty="0">
+                <a:solidFill>
+                  <a:srgbClr val="569CD6"/>
+                </a:solidFill>
+                <a:latin typeface="Courier New" pitchFamily="34" charset="0"/>
+                <a:ea typeface="Courier New" pitchFamily="34" charset="-122"/>
+                <a:cs typeface="Courier New" pitchFamily="34" charset="-120"/>
+              </a:rPr>
+              <a:t>STRUCTURE</a:t>
+            </a:r>
+            <a:r>
+              <a:rPr lang="en-US" sz="1050" dirty="0">
+                <a:solidFill>
+                  <a:srgbClr val="CCCCCC"/>
+                </a:solidFill>
+                <a:latin typeface="Courier New" pitchFamily="34" charset="0"/>
+                <a:ea typeface="Courier New" pitchFamily="34" charset="-122"/>
+                <a:cs typeface="Courier New" pitchFamily="34" charset="-120"/>
+              </a:rPr>
+              <a:t> </a:t>
+            </a:r>
+            <a:r>
+              <a:rPr lang="en-US" sz="1050" dirty="0">
+                <a:solidFill>
+                  <a:srgbClr val="CCCCCC"/>
+                </a:solidFill>
+                <a:latin typeface="Courier New" pitchFamily="34" charset="0"/>
+                <a:ea typeface="Courier New" pitchFamily="34" charset="-122"/>
+                <a:cs typeface="Courier New" pitchFamily="34" charset="-120"/>
+              </a:rPr>
+              <a:t>status</a:t>
             </a:r>
             <a:r>
               <a:rPr lang="en-US" sz="1050" dirty="0">
@@ -8176,13 +8182,24 @@
             <a:r>
               <a:rPr lang="en-US" sz="1050" dirty="0">
                 <a:solidFill>
-                  <a:srgbClr val="000000"/>
-                </a:solidFill>
-                <a:latin typeface="Courier New" pitchFamily="34" charset="0"/>
-                <a:ea typeface="Courier New" pitchFamily="34" charset="-122"/>
-                <a:cs typeface="Courier New" pitchFamily="34" charset="-120"/>
-              </a:rPr>
-              <a:t> </a:t>
+                  <a:srgbClr val="569CD6"/>
+                </a:solidFill>
+                <a:latin typeface="Courier New" pitchFamily="34" charset="0"/>
+                <a:ea typeface="Courier New" pitchFamily="34" charset="-122"/>
+                <a:cs typeface="Courier New" pitchFamily="34" charset="-120"/>
+              </a:rPr>
+              <a:t>ENDINTERFACE</a:t>
+            </a:r>
+            <a:r>
+              <a:rPr lang="en-US" sz="1050" dirty="0">
+                <a:solidFill>
+                  <a:srgbClr val="CCCCCC"/>
+                </a:solidFill>
+                <a:latin typeface="Courier New" pitchFamily="34" charset="0"/>
+                <a:ea typeface="Courier New" pitchFamily="34" charset="-122"/>
+                <a:cs typeface="Courier New" pitchFamily="34" charset="-120"/>
+              </a:rPr>
+              <a:t>.</a:t>
             </a:r>
             <a:endParaRPr lang="en-US" sz="1050" dirty="0"/>
           </a:p>
@@ -8194,15 +8211,15 @@
               <a:buNone/>
             </a:pPr>
             <a:r>
-              <a:rPr lang="en-US" sz="1050" i="1" dirty="0">
-                <a:solidFill>
-                  <a:srgbClr val="6A9955"/>
-                </a:solidFill>
-                <a:latin typeface="Courier New" pitchFamily="34" charset="0"/>
-                <a:ea typeface="Courier New" pitchFamily="34" charset="-122"/>
-                <a:cs typeface="Courier New" pitchFamily="34" charset="-120"/>
-              </a:rPr>
-              <a:t>" Uso</a:t>
+              <a:rPr lang="en-US" sz="1050" dirty="0">
+                <a:solidFill>
+                  <a:srgbClr val="000000"/>
+                </a:solidFill>
+                <a:latin typeface="Courier New" pitchFamily="34" charset="0"/>
+                <a:ea typeface="Courier New" pitchFamily="34" charset="-122"/>
+                <a:cs typeface="Courier New" pitchFamily="34" charset="-120"/>
+              </a:rPr>
+              <a:t> </a:t>
             </a:r>
             <a:endParaRPr lang="en-US" sz="1050" dirty="0"/>
           </a:p>
@@ -8214,114 +8231,15 @@
               <a:buNone/>
             </a:pPr>
             <a:r>
-              <a:rPr lang="en-US" sz="1050" dirty="0">
-                <a:solidFill>
-                  <a:srgbClr val="569CD6"/>
-                </a:solidFill>
-                <a:latin typeface="Courier New" pitchFamily="34" charset="0"/>
-                <a:ea typeface="Courier New" pitchFamily="34" charset="-122"/>
-                <a:cs typeface="Courier New" pitchFamily="34" charset="-120"/>
-              </a:rPr>
-              <a:t>DATA</a:t>
-            </a:r>
-            <a:r>
-              <a:rPr lang="en-US" sz="1050" dirty="0">
-                <a:solidFill>
-                  <a:srgbClr val="CCCCCC"/>
-                </a:solidFill>
-                <a:latin typeface="Courier New" pitchFamily="34" charset="0"/>
-                <a:ea typeface="Courier New" pitchFamily="34" charset="-122"/>
-                <a:cs typeface="Courier New" pitchFamily="34" charset="-120"/>
-              </a:rPr>
-              <a:t>(</a:t>
-            </a:r>
-            <a:r>
-              <a:rPr lang="en-US" sz="1050" dirty="0">
-                <a:solidFill>
-                  <a:srgbClr val="CCCCCC"/>
-                </a:solidFill>
-                <a:latin typeface="Courier New" pitchFamily="34" charset="0"/>
-                <a:ea typeface="Courier New" pitchFamily="34" charset="-122"/>
-                <a:cs typeface="Courier New" pitchFamily="34" charset="-120"/>
-              </a:rPr>
-              <a:t>current</a:t>
-            </a:r>
-            <a:r>
-              <a:rPr lang="en-US" sz="1050" dirty="0">
-                <a:solidFill>
-                  <a:srgbClr val="CCCCCC"/>
-                </a:solidFill>
-                <a:latin typeface="Courier New" pitchFamily="34" charset="0"/>
-                <a:ea typeface="Courier New" pitchFamily="34" charset="-122"/>
-                <a:cs typeface="Courier New" pitchFamily="34" charset="-120"/>
-              </a:rPr>
-              <a:t>)</a:t>
-            </a:r>
-            <a:r>
-              <a:rPr lang="en-US" sz="1050" dirty="0">
-                <a:solidFill>
-                  <a:srgbClr val="CCCCCC"/>
-                </a:solidFill>
-                <a:latin typeface="Courier New" pitchFamily="34" charset="0"/>
-                <a:ea typeface="Courier New" pitchFamily="34" charset="-122"/>
-                <a:cs typeface="Courier New" pitchFamily="34" charset="-120"/>
-              </a:rPr>
-              <a:t> </a:t>
-            </a:r>
-            <a:r>
-              <a:rPr lang="en-US" sz="1050" dirty="0">
-                <a:solidFill>
-                  <a:srgbClr val="CCCCCC"/>
-                </a:solidFill>
-                <a:latin typeface="Courier New" pitchFamily="34" charset="0"/>
-                <a:ea typeface="Courier New" pitchFamily="34" charset="-122"/>
-                <a:cs typeface="Courier New" pitchFamily="34" charset="-120"/>
-              </a:rPr>
-              <a:t>=</a:t>
-            </a:r>
-            <a:r>
-              <a:rPr lang="en-US" sz="1050" dirty="0">
-                <a:solidFill>
-                  <a:srgbClr val="CCCCCC"/>
-                </a:solidFill>
-                <a:latin typeface="Courier New" pitchFamily="34" charset="0"/>
-                <a:ea typeface="Courier New" pitchFamily="34" charset="-122"/>
-                <a:cs typeface="Courier New" pitchFamily="34" charset="-120"/>
-              </a:rPr>
-              <a:t> </a:t>
-            </a:r>
-            <a:r>
-              <a:rPr lang="en-US" sz="1050" dirty="0">
-                <a:solidFill>
-                  <a:srgbClr val="4EC9B0"/>
-                </a:solidFill>
-                <a:latin typeface="Courier New" pitchFamily="34" charset="0"/>
-                <a:ea typeface="Courier New" pitchFamily="34" charset="-122"/>
-                <a:cs typeface="Courier New" pitchFamily="34" charset="-120"/>
-              </a:rPr>
-              <a:t>zif_s4d430_status=&gt;</a:t>
-            </a:r>
-            <a:r>
-              <a:rPr lang="en-US" sz="1050" dirty="0">
-                <a:solidFill>
-                  <a:srgbClr val="CCCCCC"/>
-                </a:solidFill>
-                <a:latin typeface="Courier New" pitchFamily="34" charset="0"/>
-                <a:ea typeface="Courier New" pitchFamily="34" charset="-122"/>
-                <a:cs typeface="Courier New" pitchFamily="34" charset="-120"/>
-              </a:rPr>
-              <a:t>status-open</a:t>
-            </a:r>
-            <a:r>
-              <a:rPr lang="en-US" sz="1050" dirty="0">
-                <a:solidFill>
-                  <a:srgbClr val="CCCCCC"/>
-                </a:solidFill>
-                <a:latin typeface="Courier New" pitchFamily="34" charset="0"/>
-                <a:ea typeface="Courier New" pitchFamily="34" charset="-122"/>
-                <a:cs typeface="Courier New" pitchFamily="34" charset="-120"/>
-              </a:rPr>
-              <a:t>.</a:t>
+              <a:rPr lang="en-US" sz="1050" i="1" dirty="0">
+                <a:solidFill>
+                  <a:srgbClr val="6A9955"/>
+                </a:solidFill>
+                <a:latin typeface="Courier New" pitchFamily="34" charset="0"/>
+                <a:ea typeface="Courier New" pitchFamily="34" charset="-122"/>
+                <a:cs typeface="Courier New" pitchFamily="34" charset="-120"/>
+              </a:rPr>
+              <a:t>" Uso</a:t>
             </a:r>
             <a:endParaRPr lang="en-US" sz="1050" dirty="0"/>
           </a:p>
@@ -8341,6 +8259,125 @@
                 <a:ea typeface="Courier New" pitchFamily="34" charset="-122"/>
                 <a:cs typeface="Courier New" pitchFamily="34" charset="-120"/>
               </a:rPr>
+              <a:t>DATA</a:t>
+            </a:r>
+            <a:r>
+              <a:rPr lang="en-US" sz="1050" dirty="0">
+                <a:solidFill>
+                  <a:srgbClr val="CCCCCC"/>
+                </a:solidFill>
+                <a:latin typeface="Courier New" pitchFamily="34" charset="0"/>
+                <a:ea typeface="Courier New" pitchFamily="34" charset="-122"/>
+                <a:cs typeface="Courier New" pitchFamily="34" charset="-120"/>
+              </a:rPr>
+              <a:t>(</a:t>
+            </a:r>
+            <a:r>
+              <a:rPr lang="en-US" sz="1050" dirty="0">
+                <a:solidFill>
+                  <a:srgbClr val="CCCCCC"/>
+                </a:solidFill>
+                <a:latin typeface="Courier New" pitchFamily="34" charset="0"/>
+                <a:ea typeface="Courier New" pitchFamily="34" charset="-122"/>
+                <a:cs typeface="Courier New" pitchFamily="34" charset="-120"/>
+              </a:rPr>
+              <a:t>atual</a:t>
+            </a:r>
+            <a:r>
+              <a:rPr lang="en-US" sz="1050" dirty="0">
+                <a:solidFill>
+                  <a:srgbClr val="CCCCCC"/>
+                </a:solidFill>
+                <a:latin typeface="Courier New" pitchFamily="34" charset="0"/>
+                <a:ea typeface="Courier New" pitchFamily="34" charset="-122"/>
+                <a:cs typeface="Courier New" pitchFamily="34" charset="-120"/>
+              </a:rPr>
+              <a:t>)</a:t>
+            </a:r>
+            <a:r>
+              <a:rPr lang="en-US" sz="1050" dirty="0">
+                <a:solidFill>
+                  <a:srgbClr val="CCCCCC"/>
+                </a:solidFill>
+                <a:latin typeface="Courier New" pitchFamily="34" charset="0"/>
+                <a:ea typeface="Courier New" pitchFamily="34" charset="-122"/>
+                <a:cs typeface="Courier New" pitchFamily="34" charset="-120"/>
+              </a:rPr>
+              <a:t> </a:t>
+            </a:r>
+            <a:r>
+              <a:rPr lang="en-US" sz="1050" dirty="0">
+                <a:solidFill>
+                  <a:srgbClr val="CCCCCC"/>
+                </a:solidFill>
+                <a:latin typeface="Courier New" pitchFamily="34" charset="0"/>
+                <a:ea typeface="Courier New" pitchFamily="34" charset="-122"/>
+                <a:cs typeface="Courier New" pitchFamily="34" charset="-120"/>
+              </a:rPr>
+              <a:t>=</a:t>
+            </a:r>
+            <a:r>
+              <a:rPr lang="en-US" sz="1050" dirty="0">
+                <a:solidFill>
+                  <a:srgbClr val="CCCCCC"/>
+                </a:solidFill>
+                <a:latin typeface="Courier New" pitchFamily="34" charset="0"/>
+                <a:ea typeface="Courier New" pitchFamily="34" charset="-122"/>
+                <a:cs typeface="Courier New" pitchFamily="34" charset="-120"/>
+              </a:rPr>
+              <a:t> </a:t>
+            </a:r>
+            <a:r>
+              <a:rPr lang="en-US" sz="1050" dirty="0">
+                <a:solidFill>
+                  <a:srgbClr val="4EC9B0"/>
+                </a:solidFill>
+                <a:latin typeface="Courier New" pitchFamily="34" charset="0"/>
+                <a:ea typeface="Courier New" pitchFamily="34" charset="-122"/>
+                <a:cs typeface="Courier New" pitchFamily="34" charset="-120"/>
+              </a:rPr>
+              <a:t>zif_pc_status=&gt;</a:t>
+            </a:r>
+            <a:r>
+              <a:rPr lang="en-US" sz="1050" dirty="0">
+                <a:solidFill>
+                  <a:srgbClr val="CCCCCC"/>
+                </a:solidFill>
+                <a:latin typeface="Courier New" pitchFamily="34" charset="0"/>
+                <a:ea typeface="Courier New" pitchFamily="34" charset="-122"/>
+                <a:cs typeface="Courier New" pitchFamily="34" charset="-120"/>
+              </a:rPr>
+              <a:t>status-aberto</a:t>
+            </a:r>
+            <a:r>
+              <a:rPr lang="en-US" sz="1050" dirty="0">
+                <a:solidFill>
+                  <a:srgbClr val="CCCCCC"/>
+                </a:solidFill>
+                <a:latin typeface="Courier New" pitchFamily="34" charset="0"/>
+                <a:ea typeface="Courier New" pitchFamily="34" charset="-122"/>
+                <a:cs typeface="Courier New" pitchFamily="34" charset="-120"/>
+              </a:rPr>
+              <a:t>.</a:t>
+            </a:r>
+            <a:endParaRPr lang="en-US" sz="1050" dirty="0"/>
+          </a:p>
+          <a:p>
+            <a:pPr indent="0" marL="0">
+              <a:lnSpc>
+                <a:spcPct val="105000"/>
+              </a:lnSpc>
+              <a:buNone/>
+            </a:pPr>
+            <a:r>
+              <a:rPr lang="en-US" sz="1050" dirty="0">
+                <a:solidFill>
+                  <a:srgbClr val="569CD6"/>
+                </a:solidFill>
+                <a:latin typeface="Courier New" pitchFamily="34" charset="0"/>
+                <a:ea typeface="Courier New" pitchFamily="34" charset="-122"/>
+                <a:cs typeface="Courier New" pitchFamily="34" charset="-120"/>
+              </a:rPr>
               <a:t>IF</a:t>
             </a:r>
             <a:r>
@@ -8363,7 +8400,7 @@
                 <a:ea typeface="Courier New" pitchFamily="34" charset="-122"/>
                 <a:cs typeface="Courier New" pitchFamily="34" charset="-120"/>
               </a:rPr>
-              <a:t>current</a:t>
+              <a:t>atual</a:t>
             </a:r>
             <a:r>
               <a:rPr lang="en-US" sz="1050" dirty="0">
@@ -8407,18 +8444,18 @@
                 <a:ea typeface="Courier New" pitchFamily="34" charset="-122"/>
                 <a:cs typeface="Courier New" pitchFamily="34" charset="-120"/>
               </a:rPr>
-              <a:t>zif_s4d430_status=&gt;</a:t>
-            </a:r>
-            <a:r>
-              <a:rPr lang="en-US" sz="1050" dirty="0">
-                <a:solidFill>
-                  <a:srgbClr val="CCCCCC"/>
-                </a:solidFill>
-                <a:latin typeface="Courier New" pitchFamily="34" charset="0"/>
-                <a:ea typeface="Courier New" pitchFamily="34" charset="-122"/>
-                <a:cs typeface="Courier New" pitchFamily="34" charset="-120"/>
-              </a:rPr>
-              <a:t>status-accepted</a:t>
+              <a:t>zif_pc_status=&gt;</a:t>
+            </a:r>
+            <a:r>
+              <a:rPr lang="en-US" sz="1050" dirty="0">
+                <a:solidFill>
+                  <a:srgbClr val="CCCCCC"/>
+                </a:solidFill>
+                <a:latin typeface="Courier New" pitchFamily="34" charset="0"/>
+                <a:ea typeface="Courier New" pitchFamily="34" charset="-122"/>
+                <a:cs typeface="Courier New" pitchFamily="34" charset="-120"/>
+              </a:rPr>
+              <a:t>status-finalizado</a:t>
             </a:r>
             <a:r>
               <a:rPr lang="en-US" sz="1050" dirty="0">
@@ -8779,7 +8816,7 @@
                 <a:ea typeface="Courier New" pitchFamily="34" charset="-122"/>
                 <a:cs typeface="Courier New" pitchFamily="34" charset="-120"/>
               </a:rPr>
-              <a:t>status-open</a:t>
+              <a:t>status-aberto</a:t>
             </a:r>
             <a:r>
               <a:rPr lang="en-US" sz="1050" dirty="0">
@@ -8798,7 +8835,7 @@
                 <a:ea typeface="Courier New" pitchFamily="34" charset="-122"/>
                 <a:cs typeface="Courier New" pitchFamily="34" charset="-120"/>
               </a:rPr>
-              <a:t>status-accepted</a:t>
+              <a:t>status-finalizado</a:t>
             </a:r>
             <a:r>
               <a:rPr lang="en-US" sz="1050" dirty="0">
@@ -9057,7 +9094,7 @@
                   <a:srgbClr val="FFFFFF"/>
                 </a:solidFill>
               </a:rPr>
-              <a:t>O que aprendemos na aula 02.03</a:t>
+              <a:t>O que aprendemos na aula 03.03</a:t>
             </a:r>
             <a:endParaRPr lang="en-US" sz="3200" dirty="0"/>
           </a:p>
@@ -9570,7 +9607,7 @@
                   <a:srgbClr val="89D1FF"/>
                 </a:solidFill>
               </a:rPr>
-              <a:t>Próxima aula · 02.04  </a:t>
+              <a:t>Próxima aula · 03.04  </a:t>
             </a:r>
             <a:r>
               <a:rPr lang="en-US" sz="1500" dirty="0">
@@ -9600,7 +9637,7 @@
         </p:blipFill>
         <p:spPr>
           <a:xfrm>
-            <a:off x="6355080" y="1965960"/>
+            <a:off x="822960" y="1965960"/>
             <a:ext cx="256032" cy="256032"/>
           </a:xfrm>
           <a:prstGeom prst="rect">
@@ -9624,7 +9661,7 @@
         </p:blipFill>
         <p:spPr>
           <a:xfrm>
-            <a:off x="822960" y="1965960"/>
+            <a:off x="6355080" y="1965960"/>
             <a:ext cx="256032" cy="256032"/>
           </a:xfrm>
           <a:prstGeom prst="rect">
@@ -9847,7 +9884,7 @@
                   <a:srgbClr val="1D2D3E"/>
                 </a:solidFill>
               </a:rPr>
-              <a:t>Módulo 02 em 7 aulas: Dicionário e CDS</a:t>
+              <a:t>Módulo 03 em 7 aulas: Dicionário e CDS</a:t>
             </a:r>
             <a:endParaRPr lang="en-US" sz="2800" dirty="0"/>
           </a:p>
@@ -11105,7 +11142,7 @@
                   <a:srgbClr val="1D2D3E"/>
                 </a:solidFill>
               </a:rPr>
-              <a:t>construímos a camada de tipos do modelo de funcionários: do domínio técnico ao data element com rótulos, até estruturas e tabelas.</a:t>
+              <a:t>construímos a camada de tipos do modelo de pedidos de compras: do domínio técnico ao data element com rótulos, até estruturas e tabelas.</a:t>
             </a:r>
             <a:endParaRPr lang="en-US" sz="1400" dirty="0"/>
           </a:p>
@@ -11127,7 +11164,7 @@
         </p:blipFill>
         <p:spPr>
           <a:xfrm>
-            <a:off x="5455768" y="1847088"/>
+            <a:off x="5455768" y="3858768"/>
             <a:ext cx="347472" cy="347472"/>
           </a:xfrm>
           <a:prstGeom prst="rect">
@@ -11175,7 +11212,7 @@
         </p:blipFill>
         <p:spPr>
           <a:xfrm>
-            <a:off x="8275091" y="1847088"/>
+            <a:off x="5455768" y="1847088"/>
             <a:ext cx="347472" cy="347472"/>
           </a:xfrm>
           <a:prstGeom prst="rect">
@@ -11223,7 +11260,7 @@
         </p:blipFill>
         <p:spPr>
           <a:xfrm>
-            <a:off x="5455768" y="3858768"/>
+            <a:off x="8275091" y="1847088"/>
             <a:ext cx="347472" cy="347472"/>
           </a:xfrm>
           <a:prstGeom prst="rect">
@@ -12159,8 +12196,8 @@
         </p:blipFill>
         <p:spPr>
           <a:xfrm>
-            <a:off x="1598257" y="2084832"/>
-            <a:ext cx="365760" cy="365760"/>
+            <a:off x="6481542" y="3928994"/>
+            <a:ext cx="225308" cy="225308"/>
           </a:xfrm>
           <a:prstGeom prst="rect">
             <a:avLst/>
@@ -12183,7 +12220,7 @@
         </p:blipFill>
         <p:spPr>
           <a:xfrm>
-            <a:off x="4474731" y="2084832"/>
+            <a:off x="1598257" y="2084832"/>
             <a:ext cx="365760" cy="365760"/>
           </a:xfrm>
           <a:prstGeom prst="rect">
@@ -12207,7 +12244,7 @@
         </p:blipFill>
         <p:spPr>
           <a:xfrm>
-            <a:off x="7351205" y="2084832"/>
+            <a:off x="4474731" y="2084832"/>
             <a:ext cx="365760" cy="365760"/>
           </a:xfrm>
           <a:prstGeom prst="rect">
@@ -12231,7 +12268,7 @@
         </p:blipFill>
         <p:spPr>
           <a:xfrm>
-            <a:off x="10227678" y="2084832"/>
+            <a:off x="7351205" y="2084832"/>
             <a:ext cx="365760" cy="365760"/>
           </a:xfrm>
           <a:prstGeom prst="rect">
@@ -12255,8 +12292,8 @@
         </p:blipFill>
         <p:spPr>
           <a:xfrm>
-            <a:off x="820034" y="3928994"/>
-            <a:ext cx="225308" cy="225308"/>
+            <a:off x="10227678" y="2084832"/>
+            <a:ext cx="365760" cy="365760"/>
           </a:xfrm>
           <a:prstGeom prst="rect">
             <a:avLst/>
@@ -12279,7 +12316,7 @@
         </p:blipFill>
         <p:spPr>
           <a:xfrm>
-            <a:off x="6481542" y="3928994"/>
+            <a:off x="820034" y="3928994"/>
             <a:ext cx="225308" cy="225308"/>
           </a:xfrm>
           <a:prstGeom prst="rect">
@@ -12409,7 +12446,7 @@
                   <a:srgbClr val="89D1FF"/>
                 </a:solidFill>
               </a:rPr>
-              <a:t>AULA 02.03 · SEÇÃO 1</a:t>
+              <a:t>AULA 03.03 · SEÇÃO 1</a:t>
             </a:r>
             <a:endParaRPr lang="en-US" sz="1300" dirty="0"/>
           </a:p>
@@ -13438,7 +13475,7 @@
                   <a:srgbClr val="0064D9"/>
                 </a:solidFill>
               </a:rPr>
-              <a:t>Exercício oficial  </a:t>
+              <a:t>No projeto  </a:t>
             </a:r>
             <a:r>
               <a:rPr lang="en-US" sz="1200" dirty="0">
@@ -13446,7 +13483,7 @@
                   <a:srgbClr val="1D2D3E"/>
                 </a:solidFill>
               </a:rPr>
-              <a:t>o número do funcionário é um </a:t>
+              <a:t>o objeto de numeração </a:t>
             </a:r>
             <a:r>
               <a:rPr lang="en-US" sz="1200" dirty="0">
@@ -13457,6 +13494,25 @@
                 <a:ea typeface="Courier New" pitchFamily="34" charset="-122"/>
                 <a:cs typeface="Courier New" pitchFamily="34" charset="-120"/>
               </a:rPr>
+              <a:t>ZPC_NR</a:t>
+            </a:r>
+            <a:r>
+              <a:rPr lang="en-US" sz="1200" dirty="0">
+                <a:solidFill>
+                  <a:srgbClr val="1D2D3E"/>
+                </a:solidFill>
+              </a:rPr>
+              <a:t> usa um domínio </a:t>
+            </a:r>
+            <a:r>
+              <a:rPr lang="en-US" sz="1200" dirty="0">
+                <a:solidFill>
+                  <a:srgbClr val="0064D9"/>
+                </a:solidFill>
+                <a:latin typeface="Courier New" pitchFamily="34" charset="0"/>
+                <a:ea typeface="Courier New" pitchFamily="34" charset="-122"/>
+                <a:cs typeface="Courier New" pitchFamily="34" charset="-120"/>
+              </a:rPr>
               <a:t>NUMC</a:t>
             </a:r>
             <a:r>
@@ -13465,7 +13521,26 @@
                   <a:srgbClr val="1D2D3E"/>
                 </a:solidFill>
               </a:rPr>
-              <a:t> de 6 posições: só dígitos, com o mesmo nome para domínio e data element.</a:t>
+              <a:t> de 10 posições: só dígitos, como o número do pedido </a:t>
+            </a:r>
+            <a:r>
+              <a:rPr lang="en-US" sz="1200" dirty="0">
+                <a:solidFill>
+                  <a:srgbClr val="0064D9"/>
+                </a:solidFill>
+                <a:latin typeface="Courier New" pitchFamily="34" charset="0"/>
+                <a:ea typeface="Courier New" pitchFamily="34" charset="-122"/>
+                <a:cs typeface="Courier New" pitchFamily="34" charset="-120"/>
+              </a:rPr>
+              <a:t>0000000001</a:t>
+            </a:r>
+            <a:r>
+              <a:rPr lang="en-US" sz="1200" dirty="0">
+                <a:solidFill>
+                  <a:srgbClr val="1D2D3E"/>
+                </a:solidFill>
+              </a:rPr>
+              <a:t>.</a:t>
             </a:r>
             <a:endParaRPr lang="en-US" sz="1400" dirty="0"/>
           </a:p>
@@ -13487,7 +13562,7 @@
         </p:blipFill>
         <p:spPr>
           <a:xfrm>
-            <a:off x="6511900" y="1947672"/>
+            <a:off x="850392" y="1947672"/>
             <a:ext cx="256032" cy="256032"/>
           </a:xfrm>
           <a:prstGeom prst="rect">
@@ -13511,7 +13586,7 @@
         </p:blipFill>
         <p:spPr>
           <a:xfrm>
-            <a:off x="850392" y="1947672"/>
+            <a:off x="6511900" y="3959352"/>
             <a:ext cx="256032" cy="256032"/>
           </a:xfrm>
           <a:prstGeom prst="rect">
@@ -13559,7 +13634,7 @@
         </p:blipFill>
         <p:spPr>
           <a:xfrm>
-            <a:off x="6511900" y="3959352"/>
+            <a:off x="6511900" y="1947672"/>
             <a:ext cx="256032" cy="256032"/>
           </a:xfrm>
           <a:prstGeom prst="rect">
@@ -13713,7 +13788,7 @@
                   <a:srgbClr val="89D1FF"/>
                 </a:solidFill>
               </a:rPr>
-              <a:t>AULA 02.03 · SEÇÃO 2</a:t>
+              <a:t>AULA 03.03 · SEÇÃO 2</a:t>
             </a:r>
             <a:endParaRPr lang="en-US" sz="1300" dirty="0"/>
           </a:p>
@@ -14356,7 +14431,7 @@
                             <a:srgbClr val="1D2D3E"/>
                           </a:solidFill>
                         </a:rPr>
-                        <a:t>Exemplo: salário anual</a:t>
+                        <a:t>Exemplo: valor total do pedido</a:t>
                       </a:r>
                       <a:endParaRPr lang="en-US" sz="1200" dirty="0"/>
                     </a:p>
@@ -14487,7 +14562,7 @@
                             <a:srgbClr val="1D2D3E"/>
                           </a:solidFill>
                         </a:rPr>
-                        <a:t>Salary</a:t>
+                        <a:t>Valor</a:t>
                       </a:r>
                       <a:endParaRPr lang="en-US" sz="1200" dirty="0"/>
                     </a:p>
@@ -14618,7 +14693,7 @@
                             <a:srgbClr val="1D2D3E"/>
                           </a:solidFill>
                         </a:rPr>
-                        <a:t>Annual salary</a:t>
+                        <a:t>Valor total</a:t>
                       </a:r>
                       <a:endParaRPr lang="en-US" sz="1200" dirty="0"/>
                     </a:p>
@@ -14749,7 +14824,7 @@
                             <a:srgbClr val="1D2D3E"/>
                           </a:solidFill>
                         </a:rPr>
-                        <a:t>Annual salary</a:t>
+                        <a:t>Valor total do pedido</a:t>
                       </a:r>
                       <a:endParaRPr lang="en-US" sz="1200" dirty="0"/>
                     </a:p>
@@ -14880,7 +14955,7 @@
                             <a:srgbClr val="1D2D3E"/>
                           </a:solidFill>
                         </a:rPr>
-                        <a:t>Annual salary (cabeçalho de coluna)</a:t>
+                        <a:t>Valor total (cabeçalho de coluna)</a:t>
                       </a:r>
                       <a:endParaRPr lang="en-US" sz="1200" dirty="0"/>
                     </a:p>
@@ -15230,8 +15305,8 @@
         </p:blipFill>
         <p:spPr>
           <a:xfrm>
-            <a:off x="8073969" y="1917314"/>
-            <a:ext cx="225308" cy="225308"/>
+            <a:off x="749808" y="4517136"/>
+            <a:ext cx="310896" cy="310896"/>
           </a:xfrm>
           <a:prstGeom prst="rect">
             <a:avLst/>
@@ -15254,7 +15329,7 @@
         </p:blipFill>
         <p:spPr>
           <a:xfrm>
-            <a:off x="8073969" y="3288914"/>
+            <a:off x="8073969" y="1917314"/>
             <a:ext cx="225308" cy="225308"/>
           </a:xfrm>
           <a:prstGeom prst="rect">
@@ -15278,8 +15353,8 @@
         </p:blipFill>
         <p:spPr>
           <a:xfrm>
-            <a:off x="749808" y="4517136"/>
-            <a:ext cx="310896" cy="310896"/>
+            <a:off x="8073969" y="3288914"/>
+            <a:ext cx="225308" cy="225308"/>
           </a:xfrm>
           <a:prstGeom prst="rect">
             <a:avLst/>
@@ -15408,7 +15483,7 @@
                   <a:srgbClr val="89D1FF"/>
                 </a:solidFill>
               </a:rPr>
-              <a:t>AULA 02.03 · SEÇÃO 3</a:t>
+              <a:t>AULA 03.03 · SEÇÃO 3</a:t>
             </a:r>
             <a:endParaRPr lang="en-US" sz="1300" dirty="0"/>
           </a:p>
@@ -15947,7 +16022,7 @@
         <p:spPr>
           <a:xfrm>
             <a:off x="640080" y="1700784"/>
-            <a:ext cx="2386584" cy="292608"/>
+            <a:ext cx="2153412" cy="292608"/>
           </a:xfrm>
           <a:prstGeom prst="rect">
             <a:avLst/>
@@ -15967,7 +16042,7 @@
         <p:spPr>
           <a:xfrm>
             <a:off x="640080" y="1700784"/>
-            <a:ext cx="2386584" cy="27432"/>
+            <a:ext cx="2153412" cy="27432"/>
           </a:xfrm>
           <a:prstGeom prst="rect">
             <a:avLst/>
@@ -15987,7 +16062,7 @@
         <p:spPr>
           <a:xfrm>
             <a:off x="731520" y="1719072"/>
-            <a:ext cx="2203704" cy="274320"/>
+            <a:ext cx="1970532" cy="274320"/>
           </a:xfrm>
           <a:prstGeom prst="rect">
             <a:avLst/>
@@ -16008,7 +16083,7 @@
                   <a:srgbClr val="FFFFFF"/>
                 </a:solidFill>
               </a:rPr>
-              <a:t>zs4d430_s_person.tabl.abap</a:t>
+              <a:t>zpc_s_cliente.tabl.abap</a:t>
             </a:r>
             <a:endParaRPr lang="en-US" sz="950" dirty="0"/>
           </a:p>
@@ -16044,7 +16119,7 @@
                   <a:srgbClr val="9DA5B4"/>
                 </a:solidFill>
               </a:rPr>
-              <a:t>ZS4D430_## › Dictionary › Structures</a:t>
+              <a:t>Exemplo com os campos de ZTA_PC_CLIENTE e ZTA_PC_ENDERECO</a:t>
             </a:r>
             <a:endParaRPr lang="en-US" sz="850" dirty="0"/>
           </a:p>
@@ -16370,6 +16445,26 @@
             </a:r>
             <a:endParaRPr lang="en-US" sz="1050" dirty="0"/>
           </a:p>
+          <a:p>
+            <a:pPr algn="r" indent="0" marL="0">
+              <a:lnSpc>
+                <a:spcPct val="105000"/>
+              </a:lnSpc>
+              <a:buNone/>
+            </a:pPr>
+            <a:r>
+              <a:rPr lang="en-US" sz="1050" dirty="0">
+                <a:solidFill>
+                  <a:srgbClr val="6E7681"/>
+                </a:solidFill>
+                <a:latin typeface="Courier New" pitchFamily="34" charset="0"/>
+                <a:ea typeface="Courier New" pitchFamily="34" charset="-122"/>
+                <a:cs typeface="Courier New" pitchFamily="34" charset="-120"/>
+              </a:rPr>
+              <a:t>16</a:t>
+            </a:r>
+            <a:endParaRPr lang="en-US" sz="1050" dirty="0"/>
+          </a:p>
         </p:txBody>
       </p:sp>
       <p:sp>
@@ -16580,7 +16675,7 @@
                 <a:ea typeface="Courier New" pitchFamily="34" charset="-122"/>
                 <a:cs typeface="Courier New" pitchFamily="34" charset="-120"/>
               </a:rPr>
-              <a:t>zs4d430_s_address</a:t>
+              <a:t>zpc_s_endereco</a:t>
             </a:r>
             <a:r>
               <a:rPr lang="en-US" sz="1050" dirty="0">
@@ -16633,18 +16728,18 @@
                 <a:ea typeface="Courier New" pitchFamily="34" charset="-122"/>
                 <a:cs typeface="Courier New" pitchFamily="34" charset="-120"/>
               </a:rPr>
-              <a:t>street</a:t>
-            </a:r>
-            <a:r>
-              <a:rPr lang="en-US" sz="1050" dirty="0">
-                <a:solidFill>
-                  <a:srgbClr val="CCCCCC"/>
-                </a:solidFill>
-                <a:latin typeface="Courier New" pitchFamily="34" charset="0"/>
-                <a:ea typeface="Courier New" pitchFamily="34" charset="-122"/>
-                <a:cs typeface="Courier New" pitchFamily="34" charset="-120"/>
-              </a:rPr>
-              <a:t>    </a:t>
+              <a:t>logradouro</a:t>
+            </a:r>
+            <a:r>
+              <a:rPr lang="en-US" sz="1050" dirty="0">
+                <a:solidFill>
+                  <a:srgbClr val="CCCCCC"/>
+                </a:solidFill>
+                <a:latin typeface="Courier New" pitchFamily="34" charset="0"/>
+                <a:ea typeface="Courier New" pitchFamily="34" charset="-122"/>
+                <a:cs typeface="Courier New" pitchFamily="34" charset="-120"/>
+              </a:rPr>
+              <a:t> </a:t>
             </a:r>
             <a:r>
               <a:rPr lang="en-US" sz="1050" dirty="0">
@@ -16721,7 +16816,7 @@
                 <a:ea typeface="Courier New" pitchFamily="34" charset="-122"/>
                 <a:cs typeface="Courier New" pitchFamily="34" charset="-120"/>
               </a:rPr>
-              <a:t>60</a:t>
+              <a:t>150</a:t>
             </a:r>
             <a:r>
               <a:rPr lang="en-US" sz="1050" dirty="0">
@@ -16774,7 +16869,29 @@
                 <a:ea typeface="Courier New" pitchFamily="34" charset="-122"/>
                 <a:cs typeface="Courier New" pitchFamily="34" charset="-120"/>
               </a:rPr>
-              <a:t>post_code</a:t>
+              <a:t>cep</a:t>
+            </a:r>
+            <a:r>
+              <a:rPr lang="en-US" sz="1050" dirty="0">
+                <a:solidFill>
+                  <a:srgbClr val="CCCCCC"/>
+                </a:solidFill>
+                <a:latin typeface="Courier New" pitchFamily="34" charset="0"/>
+                <a:ea typeface="Courier New" pitchFamily="34" charset="-122"/>
+                <a:cs typeface="Courier New" pitchFamily="34" charset="-120"/>
+              </a:rPr>
+              <a:t>        </a:t>
+            </a:r>
+            <a:r>
+              <a:rPr lang="en-US" sz="1050" dirty="0">
+                <a:solidFill>
+                  <a:srgbClr val="CCCCCC"/>
+                </a:solidFill>
+                <a:latin typeface="Courier New" pitchFamily="34" charset="0"/>
+                <a:ea typeface="Courier New" pitchFamily="34" charset="-122"/>
+                <a:cs typeface="Courier New" pitchFamily="34" charset="-120"/>
+              </a:rPr>
+              <a:t>:</a:t>
             </a:r>
             <a:r>
               <a:rPr lang="en-US" sz="1050" dirty="0">
@@ -16796,28 +16913,6 @@
                 <a:ea typeface="Courier New" pitchFamily="34" charset="-122"/>
                 <a:cs typeface="Courier New" pitchFamily="34" charset="-120"/>
               </a:rPr>
-              <a:t>:</a:t>
-            </a:r>
-            <a:r>
-              <a:rPr lang="en-US" sz="1050" dirty="0">
-                <a:solidFill>
-                  <a:srgbClr val="CCCCCC"/>
-                </a:solidFill>
-                <a:latin typeface="Courier New" pitchFamily="34" charset="0"/>
-                <a:ea typeface="Courier New" pitchFamily="34" charset="-122"/>
-                <a:cs typeface="Courier New" pitchFamily="34" charset="-120"/>
-              </a:rPr>
-              <a:t> </a:t>
-            </a:r>
-            <a:r>
-              <a:rPr lang="en-US" sz="1050" dirty="0">
-                <a:solidFill>
-                  <a:srgbClr val="CCCCCC"/>
-                </a:solidFill>
-                <a:latin typeface="Courier New" pitchFamily="34" charset="0"/>
-                <a:ea typeface="Courier New" pitchFamily="34" charset="-122"/>
-                <a:cs typeface="Courier New" pitchFamily="34" charset="-120"/>
-              </a:rPr>
               <a:t>abap</a:t>
             </a:r>
             <a:r>
@@ -16862,7 +16957,7 @@
                 <a:ea typeface="Courier New" pitchFamily="34" charset="-122"/>
                 <a:cs typeface="Courier New" pitchFamily="34" charset="-120"/>
               </a:rPr>
-              <a:t>10</a:t>
+              <a:t>8</a:t>
             </a:r>
             <a:r>
               <a:rPr lang="en-US" sz="1050" dirty="0">
@@ -16915,18 +17010,18 @@
                 <a:ea typeface="Courier New" pitchFamily="34" charset="-122"/>
                 <a:cs typeface="Courier New" pitchFamily="34" charset="-120"/>
               </a:rPr>
-              <a:t>city</a:t>
-            </a:r>
-            <a:r>
-              <a:rPr lang="en-US" sz="1050" dirty="0">
-                <a:solidFill>
-                  <a:srgbClr val="CCCCCC"/>
-                </a:solidFill>
-                <a:latin typeface="Courier New" pitchFamily="34" charset="0"/>
-                <a:ea typeface="Courier New" pitchFamily="34" charset="-122"/>
-                <a:cs typeface="Courier New" pitchFamily="34" charset="-120"/>
-              </a:rPr>
-              <a:t>      </a:t>
+              <a:t>cidade</a:t>
+            </a:r>
+            <a:r>
+              <a:rPr lang="en-US" sz="1050" dirty="0">
+                <a:solidFill>
+                  <a:srgbClr val="CCCCCC"/>
+                </a:solidFill>
+                <a:latin typeface="Courier New" pitchFamily="34" charset="0"/>
+                <a:ea typeface="Courier New" pitchFamily="34" charset="-122"/>
+                <a:cs typeface="Courier New" pitchFamily="34" charset="-120"/>
+              </a:rPr>
+              <a:t>     </a:t>
             </a:r>
             <a:r>
               <a:rPr lang="en-US" sz="1050" dirty="0">
@@ -17003,7 +17098,7 @@
                 <a:ea typeface="Courier New" pitchFamily="34" charset="-122"/>
                 <a:cs typeface="Courier New" pitchFamily="34" charset="-120"/>
               </a:rPr>
-              <a:t>40</a:t>
+              <a:t>100</a:t>
             </a:r>
             <a:r>
               <a:rPr lang="en-US" sz="1050" dirty="0">
@@ -17045,7 +17140,128 @@
                 <a:ea typeface="Courier New" pitchFamily="34" charset="-122"/>
                 <a:cs typeface="Courier New" pitchFamily="34" charset="-120"/>
               </a:rPr>
-              <a:t>}</a:t>
+              <a:t>  </a:t>
+            </a:r>
+            <a:r>
+              <a:rPr lang="en-US" sz="1050" dirty="0">
+                <a:solidFill>
+                  <a:srgbClr val="CCCCCC"/>
+                </a:solidFill>
+                <a:latin typeface="Courier New" pitchFamily="34" charset="0"/>
+                <a:ea typeface="Courier New" pitchFamily="34" charset="-122"/>
+                <a:cs typeface="Courier New" pitchFamily="34" charset="-120"/>
+              </a:rPr>
+              <a:t>uf</a:t>
+            </a:r>
+            <a:r>
+              <a:rPr lang="en-US" sz="1050" dirty="0">
+                <a:solidFill>
+                  <a:srgbClr val="CCCCCC"/>
+                </a:solidFill>
+                <a:latin typeface="Courier New" pitchFamily="34" charset="0"/>
+                <a:ea typeface="Courier New" pitchFamily="34" charset="-122"/>
+                <a:cs typeface="Courier New" pitchFamily="34" charset="-120"/>
+              </a:rPr>
+              <a:t>         </a:t>
+            </a:r>
+            <a:r>
+              <a:rPr lang="en-US" sz="1050" dirty="0">
+                <a:solidFill>
+                  <a:srgbClr val="CCCCCC"/>
+                </a:solidFill>
+                <a:latin typeface="Courier New" pitchFamily="34" charset="0"/>
+                <a:ea typeface="Courier New" pitchFamily="34" charset="-122"/>
+                <a:cs typeface="Courier New" pitchFamily="34" charset="-120"/>
+              </a:rPr>
+              <a:t>:</a:t>
+            </a:r>
+            <a:r>
+              <a:rPr lang="en-US" sz="1050" dirty="0">
+                <a:solidFill>
+                  <a:srgbClr val="CCCCCC"/>
+                </a:solidFill>
+                <a:latin typeface="Courier New" pitchFamily="34" charset="0"/>
+                <a:ea typeface="Courier New" pitchFamily="34" charset="-122"/>
+                <a:cs typeface="Courier New" pitchFamily="34" charset="-120"/>
+              </a:rPr>
+              <a:t> </a:t>
+            </a:r>
+            <a:r>
+              <a:rPr lang="en-US" sz="1050" dirty="0">
+                <a:solidFill>
+                  <a:srgbClr val="CCCCCC"/>
+                </a:solidFill>
+                <a:latin typeface="Courier New" pitchFamily="34" charset="0"/>
+                <a:ea typeface="Courier New" pitchFamily="34" charset="-122"/>
+                <a:cs typeface="Courier New" pitchFamily="34" charset="-120"/>
+              </a:rPr>
+              <a:t>abap</a:t>
+            </a:r>
+            <a:r>
+              <a:rPr lang="en-US" sz="1050" dirty="0">
+                <a:solidFill>
+                  <a:srgbClr val="CCCCCC"/>
+                </a:solidFill>
+                <a:latin typeface="Courier New" pitchFamily="34" charset="0"/>
+                <a:ea typeface="Courier New" pitchFamily="34" charset="-122"/>
+                <a:cs typeface="Courier New" pitchFamily="34" charset="-120"/>
+              </a:rPr>
+              <a:t>.</a:t>
+            </a:r>
+            <a:r>
+              <a:rPr lang="en-US" sz="1050" dirty="0">
+                <a:solidFill>
+                  <a:srgbClr val="DCDCAA"/>
+                </a:solidFill>
+                <a:latin typeface="Courier New" pitchFamily="34" charset="0"/>
+                <a:ea typeface="Courier New" pitchFamily="34" charset="-122"/>
+                <a:cs typeface="Courier New" pitchFamily="34" charset="-120"/>
+              </a:rPr>
+              <a:t>char</a:t>
+            </a:r>
+            <a:r>
+              <a:rPr lang="en-US" sz="1050" dirty="0">
+                <a:solidFill>
+                  <a:srgbClr val="CCCCCC"/>
+                </a:solidFill>
+                <a:latin typeface="Courier New" pitchFamily="34" charset="0"/>
+                <a:ea typeface="Courier New" pitchFamily="34" charset="-122"/>
+                <a:cs typeface="Courier New" pitchFamily="34" charset="-120"/>
+              </a:rPr>
+              <a:t>(</a:t>
+            </a:r>
+            <a:r>
+              <a:rPr lang="en-US" sz="1050" dirty="0">
+                <a:solidFill>
+                  <a:srgbClr val="B5CEA8"/>
+                </a:solidFill>
+                <a:latin typeface="Courier New" pitchFamily="34" charset="0"/>
+                <a:ea typeface="Courier New" pitchFamily="34" charset="-122"/>
+                <a:cs typeface="Courier New" pitchFamily="34" charset="-120"/>
+              </a:rPr>
+              <a:t>2</a:t>
+            </a:r>
+            <a:r>
+              <a:rPr lang="en-US" sz="1050" dirty="0">
+                <a:solidFill>
+                  <a:srgbClr val="CCCCCC"/>
+                </a:solidFill>
+                <a:latin typeface="Courier New" pitchFamily="34" charset="0"/>
+                <a:ea typeface="Courier New" pitchFamily="34" charset="-122"/>
+                <a:cs typeface="Courier New" pitchFamily="34" charset="-120"/>
+              </a:rPr>
+              <a:t>)</a:t>
+            </a:r>
+            <a:r>
+              <a:rPr lang="en-US" sz="1050" dirty="0">
+                <a:solidFill>
+                  <a:srgbClr val="CCCCCC"/>
+                </a:solidFill>
+                <a:latin typeface="Courier New" pitchFamily="34" charset="0"/>
+                <a:ea typeface="Courier New" pitchFamily="34" charset="-122"/>
+                <a:cs typeface="Courier New" pitchFamily="34" charset="-120"/>
+              </a:rPr>
+              <a:t>;</a:t>
             </a:r>
             <a:endParaRPr lang="en-US" sz="1050" dirty="0"/>
           </a:p>
@@ -17059,13 +17275,13 @@
             <a:r>
               <a:rPr lang="en-US" sz="1050" dirty="0">
                 <a:solidFill>
-                  <a:srgbClr val="000000"/>
-                </a:solidFill>
-                <a:latin typeface="Courier New" pitchFamily="34" charset="0"/>
-                <a:ea typeface="Courier New" pitchFamily="34" charset="-122"/>
-                <a:cs typeface="Courier New" pitchFamily="34" charset="-120"/>
-              </a:rPr>
-              <a:t> </a:t>
+                  <a:srgbClr val="CCCCCC"/>
+                </a:solidFill>
+                <a:latin typeface="Courier New" pitchFamily="34" charset="0"/>
+                <a:ea typeface="Courier New" pitchFamily="34" charset="-122"/>
+                <a:cs typeface="Courier New" pitchFamily="34" charset="-120"/>
+              </a:rPr>
+              <a:t>}</a:t>
             </a:r>
             <a:endParaRPr lang="en-US" sz="1050" dirty="0"/>
           </a:p>
@@ -17079,57 +17295,13 @@
             <a:r>
               <a:rPr lang="en-US" sz="1050" dirty="0">
                 <a:solidFill>
-                  <a:srgbClr val="4EC9B0"/>
-                </a:solidFill>
-                <a:latin typeface="Courier New" pitchFamily="34" charset="0"/>
-                <a:ea typeface="Courier New" pitchFamily="34" charset="-122"/>
-                <a:cs typeface="Courier New" pitchFamily="34" charset="-120"/>
-              </a:rPr>
-              <a:t>@EndUserText.label</a:t>
-            </a:r>
-            <a:r>
-              <a:rPr lang="en-US" sz="1050" dirty="0">
-                <a:solidFill>
-                  <a:srgbClr val="CCCCCC"/>
+                  <a:srgbClr val="000000"/>
                 </a:solidFill>
                 <a:latin typeface="Courier New" pitchFamily="34" charset="0"/>
                 <a:ea typeface="Courier New" pitchFamily="34" charset="-122"/>
                 <a:cs typeface="Courier New" pitchFamily="34" charset="-120"/>
               </a:rPr>
               <a:t> </a:t>
-            </a:r>
-            <a:r>
-              <a:rPr lang="en-US" sz="1050" dirty="0">
-                <a:solidFill>
-                  <a:srgbClr val="CCCCCC"/>
-                </a:solidFill>
-                <a:latin typeface="Courier New" pitchFamily="34" charset="0"/>
-                <a:ea typeface="Courier New" pitchFamily="34" charset="-122"/>
-                <a:cs typeface="Courier New" pitchFamily="34" charset="-120"/>
-              </a:rPr>
-              <a:t>:</a:t>
-            </a:r>
-            <a:r>
-              <a:rPr lang="en-US" sz="1050" dirty="0">
-                <a:solidFill>
-                  <a:srgbClr val="CCCCCC"/>
-                </a:solidFill>
-                <a:latin typeface="Courier New" pitchFamily="34" charset="0"/>
-                <a:ea typeface="Courier New" pitchFamily="34" charset="-122"/>
-                <a:cs typeface="Courier New" pitchFamily="34" charset="-120"/>
-              </a:rPr>
-              <a:t> </a:t>
-            </a:r>
-            <a:r>
-              <a:rPr lang="en-US" sz="1050" dirty="0">
-                <a:solidFill>
-                  <a:srgbClr val="CE9178"/>
-                </a:solidFill>
-                <a:latin typeface="Courier New" pitchFamily="34" charset="0"/>
-                <a:ea typeface="Courier New" pitchFamily="34" charset="-122"/>
-                <a:cs typeface="Courier New" pitchFamily="34" charset="-120"/>
-              </a:rPr>
-              <a:t>'Pessoa'</a:t>
             </a:r>
             <a:endParaRPr lang="en-US" sz="1050" dirty="0"/>
           </a:p>
@@ -17149,7 +17321,7 @@
                 <a:ea typeface="Courier New" pitchFamily="34" charset="-122"/>
                 <a:cs typeface="Courier New" pitchFamily="34" charset="-120"/>
               </a:rPr>
-              <a:t>@AbapCatalog.enhancement.category</a:t>
+              <a:t>@EndUserText.label</a:t>
             </a:r>
             <a:r>
               <a:rPr lang="en-US" sz="1050" dirty="0">
@@ -17187,13 +17359,13 @@
             <a:r>
               <a:rPr lang="en-US" sz="1050" dirty="0">
                 <a:solidFill>
-                  <a:srgbClr val="C586C0"/>
-                </a:solidFill>
-                <a:latin typeface="Courier New" pitchFamily="34" charset="0"/>
-                <a:ea typeface="Courier New" pitchFamily="34" charset="-122"/>
-                <a:cs typeface="Courier New" pitchFamily="34" charset="-120"/>
-              </a:rPr>
-              <a:t>#NOT_EXTENSIBLE</a:t>
+                  <a:srgbClr val="CE9178"/>
+                </a:solidFill>
+                <a:latin typeface="Courier New" pitchFamily="34" charset="0"/>
+                <a:ea typeface="Courier New" pitchFamily="34" charset="-122"/>
+                <a:cs typeface="Courier New" pitchFamily="34" charset="-120"/>
+              </a:rPr>
+              <a:t>'Cliente'</a:t>
             </a:r>
             <a:endParaRPr lang="en-US" sz="1050" dirty="0"/>
           </a:p>
@@ -17207,13 +17379,13 @@
             <a:r>
               <a:rPr lang="en-US" sz="1050" dirty="0">
                 <a:solidFill>
-                  <a:srgbClr val="569CD6"/>
-                </a:solidFill>
-                <a:latin typeface="Courier New" pitchFamily="34" charset="0"/>
-                <a:ea typeface="Courier New" pitchFamily="34" charset="-122"/>
-                <a:cs typeface="Courier New" pitchFamily="34" charset="-120"/>
-              </a:rPr>
-              <a:t>define</a:t>
+                  <a:srgbClr val="4EC9B0"/>
+                </a:solidFill>
+                <a:latin typeface="Courier New" pitchFamily="34" charset="0"/>
+                <a:ea typeface="Courier New" pitchFamily="34" charset="-122"/>
+                <a:cs typeface="Courier New" pitchFamily="34" charset="-120"/>
+              </a:rPr>
+              <a:t>@AbapCatalog.enhancement.category</a:t>
             </a:r>
             <a:r>
               <a:rPr lang="en-US" sz="1050" dirty="0">
@@ -17229,13 +17401,13 @@
             <a:r>
               <a:rPr lang="en-US" sz="1050" dirty="0">
                 <a:solidFill>
-                  <a:srgbClr val="569CD6"/>
-                </a:solidFill>
-                <a:latin typeface="Courier New" pitchFamily="34" charset="0"/>
-                <a:ea typeface="Courier New" pitchFamily="34" charset="-122"/>
-                <a:cs typeface="Courier New" pitchFamily="34" charset="-120"/>
-              </a:rPr>
-              <a:t>structure</a:t>
+                  <a:srgbClr val="CCCCCC"/>
+                </a:solidFill>
+                <a:latin typeface="Courier New" pitchFamily="34" charset="0"/>
+                <a:ea typeface="Courier New" pitchFamily="34" charset="-122"/>
+                <a:cs typeface="Courier New" pitchFamily="34" charset="-120"/>
+              </a:rPr>
+              <a:t>:</a:t>
             </a:r>
             <a:r>
               <a:rPr lang="en-US" sz="1050" dirty="0">
@@ -17251,35 +17423,13 @@
             <a:r>
               <a:rPr lang="en-US" sz="1050" dirty="0">
                 <a:solidFill>
-                  <a:srgbClr val="CCCCCC"/>
-                </a:solidFill>
-                <a:latin typeface="Courier New" pitchFamily="34" charset="0"/>
-                <a:ea typeface="Courier New" pitchFamily="34" charset="-122"/>
-                <a:cs typeface="Courier New" pitchFamily="34" charset="-120"/>
-              </a:rPr>
-              <a:t>zs4d430_s_person</a:t>
-            </a:r>
-            <a:r>
-              <a:rPr lang="en-US" sz="1050" dirty="0">
-                <a:solidFill>
-                  <a:srgbClr val="CCCCCC"/>
-                </a:solidFill>
-                <a:latin typeface="Courier New" pitchFamily="34" charset="0"/>
-                <a:ea typeface="Courier New" pitchFamily="34" charset="-122"/>
-                <a:cs typeface="Courier New" pitchFamily="34" charset="-120"/>
-              </a:rPr>
-              <a:t> </a:t>
-            </a:r>
-            <a:r>
-              <a:rPr lang="en-US" sz="1050" dirty="0">
-                <a:solidFill>
-                  <a:srgbClr val="CCCCCC"/>
-                </a:solidFill>
-                <a:latin typeface="Courier New" pitchFamily="34" charset="0"/>
-                <a:ea typeface="Courier New" pitchFamily="34" charset="-122"/>
-                <a:cs typeface="Courier New" pitchFamily="34" charset="-120"/>
-              </a:rPr>
-              <a:t>{</a:t>
+                  <a:srgbClr val="C586C0"/>
+                </a:solidFill>
+                <a:latin typeface="Courier New" pitchFamily="34" charset="0"/>
+                <a:ea typeface="Courier New" pitchFamily="34" charset="-122"/>
+                <a:cs typeface="Courier New" pitchFamily="34" charset="-120"/>
+              </a:rPr>
+              <a:t>#NOT_EXTENSIBLE</a:t>
             </a:r>
             <a:endParaRPr lang="en-US" sz="1050" dirty="0"/>
           </a:p>
@@ -17293,24 +17443,13 @@
             <a:r>
               <a:rPr lang="en-US" sz="1050" dirty="0">
                 <a:solidFill>
-                  <a:srgbClr val="CCCCCC"/>
-                </a:solidFill>
-                <a:latin typeface="Courier New" pitchFamily="34" charset="0"/>
-                <a:ea typeface="Courier New" pitchFamily="34" charset="-122"/>
-                <a:cs typeface="Courier New" pitchFamily="34" charset="-120"/>
-              </a:rPr>
-              <a:t>  </a:t>
-            </a:r>
-            <a:r>
-              <a:rPr lang="en-US" sz="1050" dirty="0">
-                <a:solidFill>
-                  <a:srgbClr val="CCCCCC"/>
-                </a:solidFill>
-                <a:latin typeface="Courier New" pitchFamily="34" charset="0"/>
-                <a:ea typeface="Courier New" pitchFamily="34" charset="-122"/>
-                <a:cs typeface="Courier New" pitchFamily="34" charset="-120"/>
-              </a:rPr>
-              <a:t>first_name</a:t>
+                  <a:srgbClr val="569CD6"/>
+                </a:solidFill>
+                <a:latin typeface="Courier New" pitchFamily="34" charset="0"/>
+                <a:ea typeface="Courier New" pitchFamily="34" charset="-122"/>
+                <a:cs typeface="Courier New" pitchFamily="34" charset="-120"/>
+              </a:rPr>
+              <a:t>define</a:t>
             </a:r>
             <a:r>
               <a:rPr lang="en-US" sz="1050" dirty="0">
@@ -17326,13 +17465,13 @@
             <a:r>
               <a:rPr lang="en-US" sz="1050" dirty="0">
                 <a:solidFill>
-                  <a:srgbClr val="CCCCCC"/>
-                </a:solidFill>
-                <a:latin typeface="Courier New" pitchFamily="34" charset="0"/>
-                <a:ea typeface="Courier New" pitchFamily="34" charset="-122"/>
-                <a:cs typeface="Courier New" pitchFamily="34" charset="-120"/>
-              </a:rPr>
-              <a:t>:</a:t>
+                  <a:srgbClr val="569CD6"/>
+                </a:solidFill>
+                <a:latin typeface="Courier New" pitchFamily="34" charset="0"/>
+                <a:ea typeface="Courier New" pitchFamily="34" charset="-122"/>
+                <a:cs typeface="Courier New" pitchFamily="34" charset="-120"/>
+              </a:rPr>
+              <a:t>structure</a:t>
             </a:r>
             <a:r>
               <a:rPr lang="en-US" sz="1050" dirty="0">
@@ -17354,73 +17493,29 @@
                 <a:ea typeface="Courier New" pitchFamily="34" charset="-122"/>
                 <a:cs typeface="Courier New" pitchFamily="34" charset="-120"/>
               </a:rPr>
-              <a:t>abap</a:t>
-            </a:r>
-            <a:r>
-              <a:rPr lang="en-US" sz="1050" dirty="0">
-                <a:solidFill>
-                  <a:srgbClr val="CCCCCC"/>
-                </a:solidFill>
-                <a:latin typeface="Courier New" pitchFamily="34" charset="0"/>
-                <a:ea typeface="Courier New" pitchFamily="34" charset="-122"/>
-                <a:cs typeface="Courier New" pitchFamily="34" charset="-120"/>
-              </a:rPr>
-              <a:t>.</a:t>
-            </a:r>
-            <a:r>
-              <a:rPr lang="en-US" sz="1050" dirty="0">
-                <a:solidFill>
-                  <a:srgbClr val="DCDCAA"/>
-                </a:solidFill>
-                <a:latin typeface="Courier New" pitchFamily="34" charset="0"/>
-                <a:ea typeface="Courier New" pitchFamily="34" charset="-122"/>
-                <a:cs typeface="Courier New" pitchFamily="34" charset="-120"/>
-              </a:rPr>
-              <a:t>char</a:t>
-            </a:r>
-            <a:r>
-              <a:rPr lang="en-US" sz="1050" dirty="0">
-                <a:solidFill>
-                  <a:srgbClr val="CCCCCC"/>
-                </a:solidFill>
-                <a:latin typeface="Courier New" pitchFamily="34" charset="0"/>
-                <a:ea typeface="Courier New" pitchFamily="34" charset="-122"/>
-                <a:cs typeface="Courier New" pitchFamily="34" charset="-120"/>
-              </a:rPr>
-              <a:t>(</a:t>
-            </a:r>
-            <a:r>
-              <a:rPr lang="en-US" sz="1050" dirty="0">
-                <a:solidFill>
-                  <a:srgbClr val="B5CEA8"/>
-                </a:solidFill>
-                <a:latin typeface="Courier New" pitchFamily="34" charset="0"/>
-                <a:ea typeface="Courier New" pitchFamily="34" charset="-122"/>
-                <a:cs typeface="Courier New" pitchFamily="34" charset="-120"/>
-              </a:rPr>
-              <a:t>40</a:t>
-            </a:r>
-            <a:r>
-              <a:rPr lang="en-US" sz="1050" dirty="0">
-                <a:solidFill>
-                  <a:srgbClr val="CCCCCC"/>
-                </a:solidFill>
-                <a:latin typeface="Courier New" pitchFamily="34" charset="0"/>
-                <a:ea typeface="Courier New" pitchFamily="34" charset="-122"/>
-                <a:cs typeface="Courier New" pitchFamily="34" charset="-120"/>
-              </a:rPr>
-              <a:t>)</a:t>
-            </a:r>
-            <a:r>
-              <a:rPr lang="en-US" sz="1050" dirty="0">
-                <a:solidFill>
-                  <a:srgbClr val="CCCCCC"/>
-                </a:solidFill>
-                <a:latin typeface="Courier New" pitchFamily="34" charset="0"/>
-                <a:ea typeface="Courier New" pitchFamily="34" charset="-122"/>
-                <a:cs typeface="Courier New" pitchFamily="34" charset="-120"/>
-              </a:rPr>
-              <a:t>;</a:t>
+              <a:t>zpc_s_cliente</a:t>
+            </a:r>
+            <a:r>
+              <a:rPr lang="en-US" sz="1050" dirty="0">
+                <a:solidFill>
+                  <a:srgbClr val="CCCCCC"/>
+                </a:solidFill>
+                <a:latin typeface="Courier New" pitchFamily="34" charset="0"/>
+                <a:ea typeface="Courier New" pitchFamily="34" charset="-122"/>
+                <a:cs typeface="Courier New" pitchFamily="34" charset="-120"/>
+              </a:rPr>
+              <a:t> </a:t>
+            </a:r>
+            <a:r>
+              <a:rPr lang="en-US" sz="1050" dirty="0">
+                <a:solidFill>
+                  <a:srgbClr val="CCCCCC"/>
+                </a:solidFill>
+                <a:latin typeface="Courier New" pitchFamily="34" charset="0"/>
+                <a:ea typeface="Courier New" pitchFamily="34" charset="-122"/>
+                <a:cs typeface="Courier New" pitchFamily="34" charset="-120"/>
+              </a:rPr>
+              <a:t>{</a:t>
             </a:r>
             <a:endParaRPr lang="en-US" sz="1050" dirty="0"/>
           </a:p>
@@ -17451,18 +17546,18 @@
                 <a:ea typeface="Courier New" pitchFamily="34" charset="-122"/>
                 <a:cs typeface="Courier New" pitchFamily="34" charset="-120"/>
               </a:rPr>
-              <a:t>last_name</a:t>
-            </a:r>
-            <a:r>
-              <a:rPr lang="en-US" sz="1050" dirty="0">
-                <a:solidFill>
-                  <a:srgbClr val="CCCCCC"/>
-                </a:solidFill>
-                <a:latin typeface="Courier New" pitchFamily="34" charset="0"/>
-                <a:ea typeface="Courier New" pitchFamily="34" charset="-122"/>
-                <a:cs typeface="Courier New" pitchFamily="34" charset="-120"/>
-              </a:rPr>
-              <a:t>  </a:t>
+              <a:t>nome</a:t>
+            </a:r>
+            <a:r>
+              <a:rPr lang="en-US" sz="1050" dirty="0">
+                <a:solidFill>
+                  <a:srgbClr val="CCCCCC"/>
+                </a:solidFill>
+                <a:latin typeface="Courier New" pitchFamily="34" charset="0"/>
+                <a:ea typeface="Courier New" pitchFamily="34" charset="-122"/>
+                <a:cs typeface="Courier New" pitchFamily="34" charset="-120"/>
+              </a:rPr>
+              <a:t>     </a:t>
             </a:r>
             <a:r>
               <a:rPr lang="en-US" sz="1050" dirty="0">
@@ -17539,7 +17634,7 @@
                 <a:ea typeface="Courier New" pitchFamily="34" charset="-122"/>
                 <a:cs typeface="Courier New" pitchFamily="34" charset="-120"/>
               </a:rPr>
-              <a:t>40</a:t>
+              <a:t>255</a:t>
             </a:r>
             <a:r>
               <a:rPr lang="en-US" sz="1050" dirty="0">
@@ -17592,18 +17687,18 @@
                 <a:ea typeface="Courier New" pitchFamily="34" charset="-122"/>
                 <a:cs typeface="Courier New" pitchFamily="34" charset="-120"/>
               </a:rPr>
-              <a:t>address</a:t>
-            </a:r>
-            <a:r>
-              <a:rPr lang="en-US" sz="1050" dirty="0">
-                <a:solidFill>
-                  <a:srgbClr val="CCCCCC"/>
-                </a:solidFill>
-                <a:latin typeface="Courier New" pitchFamily="34" charset="0"/>
-                <a:ea typeface="Courier New" pitchFamily="34" charset="-122"/>
-                <a:cs typeface="Courier New" pitchFamily="34" charset="-120"/>
-              </a:rPr>
-              <a:t>    </a:t>
+              <a:t>cpf</a:t>
+            </a:r>
+            <a:r>
+              <a:rPr lang="en-US" sz="1050" dirty="0">
+                <a:solidFill>
+                  <a:srgbClr val="CCCCCC"/>
+                </a:solidFill>
+                <a:latin typeface="Courier New" pitchFamily="34" charset="0"/>
+                <a:ea typeface="Courier New" pitchFamily="34" charset="-122"/>
+                <a:cs typeface="Courier New" pitchFamily="34" charset="-120"/>
+              </a:rPr>
+              <a:t>      </a:t>
             </a:r>
             <a:r>
               <a:rPr lang="en-US" sz="1050" dirty="0">
@@ -17630,6 +17725,147 @@
             <a:r>
               <a:rPr lang="en-US" sz="1050" dirty="0">
                 <a:solidFill>
+                  <a:srgbClr val="CCCCCC"/>
+                </a:solidFill>
+                <a:latin typeface="Courier New" pitchFamily="34" charset="0"/>
+                <a:ea typeface="Courier New" pitchFamily="34" charset="-122"/>
+                <a:cs typeface="Courier New" pitchFamily="34" charset="-120"/>
+              </a:rPr>
+              <a:t>abap</a:t>
+            </a:r>
+            <a:r>
+              <a:rPr lang="en-US" sz="1050" dirty="0">
+                <a:solidFill>
+                  <a:srgbClr val="CCCCCC"/>
+                </a:solidFill>
+                <a:latin typeface="Courier New" pitchFamily="34" charset="0"/>
+                <a:ea typeface="Courier New" pitchFamily="34" charset="-122"/>
+                <a:cs typeface="Courier New" pitchFamily="34" charset="-120"/>
+              </a:rPr>
+              <a:t>.</a:t>
+            </a:r>
+            <a:r>
+              <a:rPr lang="en-US" sz="1050" dirty="0">
+                <a:solidFill>
+                  <a:srgbClr val="DCDCAA"/>
+                </a:solidFill>
+                <a:latin typeface="Courier New" pitchFamily="34" charset="0"/>
+                <a:ea typeface="Courier New" pitchFamily="34" charset="-122"/>
+                <a:cs typeface="Courier New" pitchFamily="34" charset="-120"/>
+              </a:rPr>
+              <a:t>char</a:t>
+            </a:r>
+            <a:r>
+              <a:rPr lang="en-US" sz="1050" dirty="0">
+                <a:solidFill>
+                  <a:srgbClr val="CCCCCC"/>
+                </a:solidFill>
+                <a:latin typeface="Courier New" pitchFamily="34" charset="0"/>
+                <a:ea typeface="Courier New" pitchFamily="34" charset="-122"/>
+                <a:cs typeface="Courier New" pitchFamily="34" charset="-120"/>
+              </a:rPr>
+              <a:t>(</a:t>
+            </a:r>
+            <a:r>
+              <a:rPr lang="en-US" sz="1050" dirty="0">
+                <a:solidFill>
+                  <a:srgbClr val="B5CEA8"/>
+                </a:solidFill>
+                <a:latin typeface="Courier New" pitchFamily="34" charset="0"/>
+                <a:ea typeface="Courier New" pitchFamily="34" charset="-122"/>
+                <a:cs typeface="Courier New" pitchFamily="34" charset="-120"/>
+              </a:rPr>
+              <a:t>11</a:t>
+            </a:r>
+            <a:r>
+              <a:rPr lang="en-US" sz="1050" dirty="0">
+                <a:solidFill>
+                  <a:srgbClr val="CCCCCC"/>
+                </a:solidFill>
+                <a:latin typeface="Courier New" pitchFamily="34" charset="0"/>
+                <a:ea typeface="Courier New" pitchFamily="34" charset="-122"/>
+                <a:cs typeface="Courier New" pitchFamily="34" charset="-120"/>
+              </a:rPr>
+              <a:t>)</a:t>
+            </a:r>
+            <a:r>
+              <a:rPr lang="en-US" sz="1050" dirty="0">
+                <a:solidFill>
+                  <a:srgbClr val="CCCCCC"/>
+                </a:solidFill>
+                <a:latin typeface="Courier New" pitchFamily="34" charset="0"/>
+                <a:ea typeface="Courier New" pitchFamily="34" charset="-122"/>
+                <a:cs typeface="Courier New" pitchFamily="34" charset="-120"/>
+              </a:rPr>
+              <a:t>;</a:t>
+            </a:r>
+            <a:endParaRPr lang="en-US" sz="1050" dirty="0"/>
+          </a:p>
+          <a:p>
+            <a:pPr indent="0" marL="0">
+              <a:lnSpc>
+                <a:spcPct val="105000"/>
+              </a:lnSpc>
+              <a:buNone/>
+            </a:pPr>
+            <a:r>
+              <a:rPr lang="en-US" sz="1050" dirty="0">
+                <a:solidFill>
+                  <a:srgbClr val="CCCCCC"/>
+                </a:solidFill>
+                <a:latin typeface="Courier New" pitchFamily="34" charset="0"/>
+                <a:ea typeface="Courier New" pitchFamily="34" charset="-122"/>
+                <a:cs typeface="Courier New" pitchFamily="34" charset="-120"/>
+              </a:rPr>
+              <a:t>  </a:t>
+            </a:r>
+            <a:r>
+              <a:rPr lang="en-US" sz="1050" dirty="0">
+                <a:solidFill>
+                  <a:srgbClr val="CCCCCC"/>
+                </a:solidFill>
+                <a:latin typeface="Courier New" pitchFamily="34" charset="0"/>
+                <a:ea typeface="Courier New" pitchFamily="34" charset="-122"/>
+                <a:cs typeface="Courier New" pitchFamily="34" charset="-120"/>
+              </a:rPr>
+              <a:t>endereco</a:t>
+            </a:r>
+            <a:r>
+              <a:rPr lang="en-US" sz="1050" dirty="0">
+                <a:solidFill>
+                  <a:srgbClr val="CCCCCC"/>
+                </a:solidFill>
+                <a:latin typeface="Courier New" pitchFamily="34" charset="0"/>
+                <a:ea typeface="Courier New" pitchFamily="34" charset="-122"/>
+                <a:cs typeface="Courier New" pitchFamily="34" charset="-120"/>
+              </a:rPr>
+              <a:t> </a:t>
+            </a:r>
+            <a:r>
+              <a:rPr lang="en-US" sz="1050" dirty="0">
+                <a:solidFill>
+                  <a:srgbClr val="CCCCCC"/>
+                </a:solidFill>
+                <a:latin typeface="Courier New" pitchFamily="34" charset="0"/>
+                <a:ea typeface="Courier New" pitchFamily="34" charset="-122"/>
+                <a:cs typeface="Courier New" pitchFamily="34" charset="-120"/>
+              </a:rPr>
+              <a:t>:</a:t>
+            </a:r>
+            <a:r>
+              <a:rPr lang="en-US" sz="1050" dirty="0">
+                <a:solidFill>
+                  <a:srgbClr val="CCCCCC"/>
+                </a:solidFill>
+                <a:latin typeface="Courier New" pitchFamily="34" charset="0"/>
+                <a:ea typeface="Courier New" pitchFamily="34" charset="-122"/>
+                <a:cs typeface="Courier New" pitchFamily="34" charset="-120"/>
+              </a:rPr>
+              <a:t> </a:t>
+            </a:r>
+            <a:r>
+              <a:rPr lang="en-US" sz="1050" dirty="0">
+                <a:solidFill>
                   <a:srgbClr val="569CD6"/>
                 </a:solidFill>
                 <a:latin typeface="Courier New" pitchFamily="34" charset="0"/>
@@ -17658,7 +17894,7 @@
                 <a:ea typeface="Courier New" pitchFamily="34" charset="-122"/>
                 <a:cs typeface="Courier New" pitchFamily="34" charset="-120"/>
               </a:rPr>
-              <a:t>zs4d430_s_address</a:t>
+              <a:t>zpc_s_endereco</a:t>
             </a:r>
             <a:r>
               <a:rPr lang="en-US" sz="1050" dirty="0">
@@ -17947,7 +18183,7 @@
                 <a:ea typeface="Courier New" pitchFamily="34" charset="-122"/>
                 <a:cs typeface="Courier New" pitchFamily="34" charset="-120"/>
               </a:rPr>
-              <a:t>address : zs4d430_s_address;</a:t>
+              <a:t>endereco : zpc_s_endereco;</a:t>
             </a:r>
             <a:r>
               <a:rPr lang="en-US" sz="1050" dirty="0">
@@ -17966,7 +18202,7 @@
                 <a:ea typeface="Courier New" pitchFamily="34" charset="-122"/>
                 <a:cs typeface="Courier New" pitchFamily="34" charset="-120"/>
               </a:rPr>
-              <a:t>person-address-city</a:t>
+              <a:t>cliente-endereco-cidade</a:t>
             </a:r>
             <a:r>
               <a:rPr lang="en-US" sz="1050" dirty="0">
@@ -18105,7 +18341,7 @@
                 <a:ea typeface="Courier New" pitchFamily="34" charset="-122"/>
                 <a:cs typeface="Courier New" pitchFamily="34" charset="-120"/>
               </a:rPr>
-              <a:t>person-city</a:t>
+              <a:t>cliente-cidade</a:t>
             </a:r>
             <a:r>
               <a:rPr lang="en-US" sz="1050" dirty="0">
